--- a/Bases de Datos II/Clases/Presentacion del Curso - Bases de Datos II.pptx
+++ b/Bases de Datos II/Clases/Presentacion del Curso - Bases de Datos II.pptx
@@ -3408,15 +3408,6 @@
               </a:rPr>
               <a:t>Presencialidad asistida</a:t>
             </a:r>
-            <a:r>
-              <a:rPr sz="1500" b="0" i="0">
-                <a:solidFill>
-                  <a:srgbClr val="333333"/>
-                </a:solidFill>
-                <a:latin typeface="Calibri"/>
-              </a:rPr>
-              <a:t> (clases y parciales síncronos)</a:t>
-            </a:r>
           </a:p>
           <a:p>
             <a:pPr>
@@ -4602,7 +4593,7 @@
                 </a:solidFill>
                 <a:latin typeface="Calibri"/>
               </a:rPr>
-              <a:t>Lunes 18:00 – 20:00 · Presencialidad asistida (clases y parciales síncronos) · Grupo 641A-2.</a:t>
+              <a:t>Lunes 18:00 – 20:00 · Presencialidad asistida: Clase 1 y parciales presencial · resto virtual síncrona · festivos autónoma · Grupo 641A-2.</a:t>
             </a:r>
           </a:p>
         </p:txBody>
@@ -8619,7 +8610,7 @@
                 </a:solidFill>
                 <a:latin typeface="Calibri"/>
               </a:rPr>
-              <a:t> → </a:t>
+              <a:t> → cierre. Modalidad: </a:t>
             </a:r>
             <a:r>
               <a:rPr sz="1600" b="1" i="0">
@@ -8628,7 +8619,7 @@
                 </a:solidFill>
                 <a:latin typeface="Calibri"/>
               </a:rPr>
-              <a:t>Quiz corto</a:t>
+              <a:t>Presencialidad asistida</a:t>
             </a:r>
             <a:r>
               <a:rPr sz="1600" b="0" i="0">
@@ -8637,7 +8628,7 @@
                 </a:solidFill>
                 <a:latin typeface="Calibri"/>
               </a:rPr>
-              <a:t>. Modalidad: </a:t>
+              <a:t>: Clase 1 y parciales </a:t>
             </a:r>
             <a:r>
               <a:rPr sz="1600" b="1" i="0">
@@ -8646,7 +8637,7 @@
                 </a:solidFill>
                 <a:latin typeface="Calibri"/>
               </a:rPr>
-              <a:t>Presencialidad asistida</a:t>
+              <a:t>presencial</a:t>
             </a:r>
             <a:r>
               <a:rPr sz="1600" b="0" i="0">
@@ -8655,7 +8646,43 @@
                 </a:solidFill>
                 <a:latin typeface="Calibri"/>
               </a:rPr>
-              <a:t> (parciales presenciales · resto virtual · festivos autónomos).</a:t>
+              <a:t>; resto </a:t>
+            </a:r>
+            <a:r>
+              <a:rPr sz="1600" b="1" i="0">
+                <a:solidFill>
+                  <a:srgbClr val="333333"/>
+                </a:solidFill>
+                <a:latin typeface="Calibri"/>
+              </a:rPr>
+              <a:t>virtual síncrona</a:t>
+            </a:r>
+            <a:r>
+              <a:rPr sz="1600" b="0" i="0">
+                <a:solidFill>
+                  <a:srgbClr val="333333"/>
+                </a:solidFill>
+                <a:latin typeface="Calibri"/>
+              </a:rPr>
+              <a:t>; festivos = </a:t>
+            </a:r>
+            <a:r>
+              <a:rPr sz="1600" b="1" i="0">
+                <a:solidFill>
+                  <a:srgbClr val="333333"/>
+                </a:solidFill>
+                <a:latin typeface="Calibri"/>
+              </a:rPr>
+              <a:t>clase autónoma</a:t>
+            </a:r>
+            <a:r>
+              <a:rPr sz="1600" b="0" i="0">
+                <a:solidFill>
+                  <a:srgbClr val="333333"/>
+                </a:solidFill>
+                <a:latin typeface="Calibri"/>
+              </a:rPr>
+              <a:t>.</a:t>
             </a:r>
           </a:p>
           <a:p>

--- a/Bases de Datos II/Clases/Presentacion del Curso - Bases de Datos II.pptx
+++ b/Bases de Datos II/Clases/Presentacion del Curso - Bases de Datos II.pptx
@@ -9213,7 +9213,7 @@
                 </a:solidFill>
                 <a:latin typeface="Calibri"/>
               </a:rPr>
-              <a:t>–   Talleres / Quiz · 10%</a:t>
+              <a:t>–   Talleres o Quiz · 10%</a:t>
             </a:r>
           </a:p>
           <a:p>
@@ -9493,7 +9493,7 @@
                 </a:solidFill>
                 <a:latin typeface="Calibri"/>
               </a:rPr>
-              <a:t>–   Talleres / Quiz · 10%</a:t>
+              <a:t>–   Talleres o Quiz · 10%</a:t>
             </a:r>
           </a:p>
           <a:p>

--- a/Bases de Datos II/Clases/Presentacion del Curso - Bases de Datos II.pptx
+++ b/Bases de Datos II/Clases/Presentacion del Curso - Bases de Datos II.pptx
@@ -4731,7 +4731,7 @@
                 </a:solidFill>
                 <a:latin typeface="Calibri"/>
               </a:rPr>
-              <a:t>Día 1: Sesión 0 (Presentación del curso, archivo aparte) + Clase 1 (diagnóstico + revisión BD I). Festivos = autónoma en Campus Virtual.</a:t>
+              <a:t>Día 1: Sesión 0 (Presentación del curso, archivo aparte) + Clase 1 (diagnóstico + revisión BD I). Festivos = autónoma con actividad en ExamLab.</a:t>
             </a:r>
           </a:p>
         </p:txBody>

--- a/Bases de Datos II/Clases/Presentacion del Curso - Bases de Datos II.pptx
+++ b/Bases de Datos II/Clases/Presentacion del Curso - Bases de Datos II.pptx
@@ -4154,7 +4154,7 @@
                 </a:solidFill>
                 <a:latin typeface="Calibri"/>
               </a:rPr>
-              <a:t> (examlab.lovable.app/app): entrega de talleres + quices/parciales del curso.</a:t>
+              <a:t> (https://examlab.lovable.app/): entrega de talleres + quices/parciales del curso.</a:t>
             </a:r>
           </a:p>
           <a:p>
@@ -8734,7 +8734,7 @@
                 </a:solidFill>
                 <a:latin typeface="Calibri"/>
               </a:rPr>
-              <a:t> (no es la plataforma oficial de la UNIAJC, la usamos solo para esto).</a:t>
+              <a:t> (https://examlab.lovable.app/) — no es la plataforma oficial de la UNIAJC, la usamos solo para esto.</a:t>
             </a:r>
           </a:p>
           <a:p>

--- a/Bases de Datos II/Clases/Presentacion del Curso - Bases de Datos II.pptx
+++ b/Bases de Datos II/Clases/Presentacion del Curso - Bases de Datos II.pptx
@@ -3776,7 +3776,7 @@
                 </a:solidFill>
                 <a:latin typeface="Calibri"/>
               </a:rPr>
-              <a:t>–   Hitos: avance </a:t>
+              <a:t>–   Hitos: avance + preparación final en la </a:t>
             </a:r>
             <a:r>
               <a:rPr sz="1600" b="1" i="0">
@@ -3785,7 +3785,7 @@
                 </a:solidFill>
                 <a:latin typeface="Calibri"/>
               </a:rPr>
-              <a:t>Clase 11</a:t>
+              <a:t>sesión 10</a:t>
             </a:r>
             <a:r>
               <a:rPr sz="1600" b="0" i="0">
@@ -3794,7 +3794,7 @@
                 </a:solidFill>
                 <a:latin typeface="Calibri"/>
               </a:rPr>
-              <a:t> (19/10) · prep. </a:t>
+              <a:t> (26/10, sesión doble Clases 11+12) · </a:t>
             </a:r>
             <a:r>
               <a:rPr sz="1600" b="1" i="0">
@@ -3803,7 +3803,7 @@
                 </a:solidFill>
                 <a:latin typeface="Calibri"/>
               </a:rPr>
-              <a:t>Clase 12</a:t>
+              <a:t>Parcial 3</a:t>
             </a:r>
             <a:r>
               <a:rPr sz="1600" b="0" i="0">
@@ -3812,7 +3812,7 @@
                 </a:solidFill>
                 <a:latin typeface="Calibri"/>
               </a:rPr>
-              <a:t> (26/10) · Parcial 3 </a:t>
+              <a:t> sesión 12 (09/11) · </a:t>
             </a:r>
             <a:r>
               <a:rPr sz="1600" b="1" i="0">
@@ -3821,7 +3821,7 @@
                 </a:solidFill>
                 <a:latin typeface="Calibri"/>
               </a:rPr>
-              <a:t>Clase 14</a:t>
+              <a:t>sustentación</a:t>
             </a:r>
             <a:r>
               <a:rPr sz="1600" b="0" i="0">
@@ -3830,25 +3830,7 @@
                 </a:solidFill>
                 <a:latin typeface="Calibri"/>
               </a:rPr>
-              <a:t> (09/11) · cierre </a:t>
-            </a:r>
-            <a:r>
-              <a:rPr sz="1600" b="1" i="0">
-                <a:solidFill>
-                  <a:srgbClr val="333333"/>
-                </a:solidFill>
-                <a:latin typeface="Calibri"/>
-              </a:rPr>
-              <a:t>Clase 15</a:t>
-            </a:r>
-            <a:r>
-              <a:rPr sz="1600" b="0" i="0">
-                <a:solidFill>
-                  <a:srgbClr val="333333"/>
-                </a:solidFill>
-                <a:latin typeface="Calibri"/>
-              </a:rPr>
-              <a:t> (16/11, autónoma).</a:t>
+              <a:t> sesión 13 (16/11).</a:t>
             </a:r>
           </a:p>
           <a:p>
@@ -4869,7 +4851,7 @@
                 </a:solidFill>
                 <a:latin typeface="Calibri"/>
               </a:rPr>
-              <a:t>Parciales NUNCA en autonoma: P1=Clase 5 (07/09), P2=Clase 9 (05/10), P3=Clase 14 (09/11).</a:t>
+              <a:t>Parciales NUNCA en autonoma: P1=sesión 5 (21/09), P2=sesión 9 (19/10), P3=sesión 12 (09/11). La sesión 13 (16/11) es de sustentación del PI VetCare.</a:t>
             </a:r>
           </a:p>
         </p:txBody>
@@ -8549,7 +8531,7 @@
                 </a:solidFill>
                 <a:latin typeface="Calibri"/>
               </a:rPr>
-              <a:t>Clase 1</a:t>
+              <a:t>Sesión 1</a:t>
             </a:r>
             <a:r>
               <a:rPr sz="1600" b="0" i="0">
@@ -8558,7 +8540,7 @@
                 </a:solidFill>
                 <a:latin typeface="Calibri"/>
               </a:rPr>
-              <a:t> (material en archivo aparte) = diagnóstico de conocimientos previos + arranque temático — mismo bloque de hoy.</a:t>
+              <a:t> (material «Clase 1», archivo aparte) = diagnóstico de conocimientos previos + arranque temático — mismo bloque de hoy.</a:t>
             </a:r>
           </a:p>
           <a:p>
@@ -8610,7 +8592,7 @@
                 </a:solidFill>
                 <a:latin typeface="Calibri"/>
               </a:rPr>
-              <a:t> → cierre. Modalidad: </a:t>
+              <a:t> → cierre. </a:t>
             </a:r>
             <a:r>
               <a:rPr sz="1600" b="1" i="0">
@@ -8619,7 +8601,7 @@
                 </a:solidFill>
                 <a:latin typeface="Calibri"/>
               </a:rPr>
-              <a:t>Presencialidad asistida</a:t>
+              <a:t>13 sesiones</a:t>
             </a:r>
             <a:r>
               <a:rPr sz="1600" b="0" i="0">
@@ -8628,7 +8610,7 @@
                 </a:solidFill>
                 <a:latin typeface="Calibri"/>
               </a:rPr>
-              <a:t>: Clase 1 y parciales </a:t>
+              <a:t>: sesión 1 y parciales (</a:t>
             </a:r>
             <a:r>
               <a:rPr sz="1600" b="1" i="0">
@@ -8637,6 +8619,24 @@
                 </a:solidFill>
                 <a:latin typeface="Calibri"/>
               </a:rPr>
+              <a:t>5 / 9 / 12</a:t>
+            </a:r>
+            <a:r>
+              <a:rPr sz="1600" b="0" i="0">
+                <a:solidFill>
+                  <a:srgbClr val="333333"/>
+                </a:solidFill>
+                <a:latin typeface="Calibri"/>
+              </a:rPr>
+              <a:t>) </a:t>
+            </a:r>
+            <a:r>
+              <a:rPr sz="1600" b="1" i="0">
+                <a:solidFill>
+                  <a:srgbClr val="333333"/>
+                </a:solidFill>
+                <a:latin typeface="Calibri"/>
+              </a:rPr>
               <a:t>presencial</a:t>
             </a:r>
             <a:r>
@@ -8674,6 +8674,42 @@
                 <a:latin typeface="Calibri"/>
               </a:rPr>
               <a:t>clase autónoma</a:t>
+            </a:r>
+            <a:r>
+              <a:rPr sz="1600" b="0" i="0">
+                <a:solidFill>
+                  <a:srgbClr val="333333"/>
+                </a:solidFill>
+                <a:latin typeface="Calibri"/>
+              </a:rPr>
+              <a:t>; dos sesiones </a:t>
+            </a:r>
+            <a:r>
+              <a:rPr sz="1600" b="1" i="0">
+                <a:solidFill>
+                  <a:srgbClr val="333333"/>
+                </a:solidFill>
+                <a:latin typeface="Calibri"/>
+              </a:rPr>
+              <a:t>dobles</a:t>
+            </a:r>
+            <a:r>
+              <a:rPr sz="1600" b="0" i="0">
+                <a:solidFill>
+                  <a:srgbClr val="333333"/>
+                </a:solidFill>
+                <a:latin typeface="Calibri"/>
+              </a:rPr>
+              <a:t> y sustentación en la </a:t>
+            </a:r>
+            <a:r>
+              <a:rPr sz="1600" b="1" i="0">
+                <a:solidFill>
+                  <a:srgbClr val="333333"/>
+                </a:solidFill>
+                <a:latin typeface="Calibri"/>
+              </a:rPr>
+              <a:t>sesión 13</a:t>
             </a:r>
             <a:r>
               <a:rPr sz="1600" b="0" i="0">
@@ -9140,7 +9176,7 @@
                 </a:solidFill>
                 <a:latin typeface="Calibri"/>
               </a:rPr>
-              <a:t>10/08 – 13/09/2026</a:t>
+              <a:t>24/08 – 27/09/2026</a:t>
             </a:r>
           </a:p>
         </p:txBody>
@@ -9197,7 +9233,7 @@
                 </a:solidFill>
                 <a:latin typeface="Calibri"/>
               </a:rPr>
-              <a:t> (07/09 · Clase 5) · 10%</a:t>
+              <a:t> (21/09 · sesión 5) · 10%</a:t>
             </a:r>
           </a:p>
           <a:p>
@@ -9420,7 +9456,7 @@
                 </a:solidFill>
                 <a:latin typeface="Calibri"/>
               </a:rPr>
-              <a:t>14/09 – 18/10/2026</a:t>
+              <a:t>28/09 – 25/10/2026</a:t>
             </a:r>
           </a:p>
         </p:txBody>
@@ -9477,7 +9513,7 @@
                 </a:solidFill>
                 <a:latin typeface="Calibri"/>
               </a:rPr>
-              <a:t> (05/10 · Clase 9) · 10%</a:t>
+              <a:t> (19/10 · sesión 9) · 10%</a:t>
             </a:r>
           </a:p>
           <a:p>
@@ -9700,7 +9736,7 @@
                 </a:solidFill>
                 <a:latin typeface="Calibri"/>
               </a:rPr>
-              <a:t>19/10 – 22/11/2026</a:t>
+              <a:t>26/10 – 22/11/2026</a:t>
             </a:r>
           </a:p>
         </p:txBody>
@@ -9757,7 +9793,7 @@
                 </a:solidFill>
                 <a:latin typeface="Calibri"/>
               </a:rPr>
-              <a:t> (09/11 · Clase 14) · 15%</a:t>
+              <a:t> (09/11 · sesión 12) · 15%</a:t>
             </a:r>
           </a:p>
           <a:p>
@@ -10055,7 +10091,25 @@
                 </a:solidFill>
                 <a:latin typeface="Calibri"/>
               </a:rPr>
-              <a:t>Día 1: Sesión 0 (Presentación del curso, archivo aparte) + Clase 1 (diagnóstico · tema)</a:t>
+              <a:t>13 sesiones · los 15 temas se conservan: dos sesiones son </a:t>
+            </a:r>
+            <a:r>
+              <a:rPr sz="1300" b="1" i="0">
+                <a:solidFill>
+                  <a:srgbClr val="666666"/>
+                </a:solidFill>
+                <a:latin typeface="Calibri"/>
+              </a:rPr>
+              <a:t>dobles</a:t>
+            </a:r>
+            <a:r>
+              <a:rPr sz="1300" b="0" i="0">
+                <a:solidFill>
+                  <a:srgbClr val="666666"/>
+                </a:solidFill>
+                <a:latin typeface="Calibri"/>
+              </a:rPr>
+              <a:t> (dos temas en un bloque). Día 1: Sesión 0 (archivo aparte) + Sesión 1 (diagnóstico · tema)</a:t>
             </a:r>
           </a:p>
         </p:txBody>
@@ -10112,7 +10166,7 @@
                 </a:solidFill>
                 <a:latin typeface="Calibri"/>
               </a:rPr>
-              <a:t> Presentación del curso (logística) (10/08)</a:t>
+              <a:t> Presentación del curso (logística) + socialización del PI VetCare (24/08)</a:t>
             </a:r>
           </a:p>
           <a:p>
@@ -10137,7 +10191,7 @@
                 </a:solidFill>
                 <a:latin typeface="Calibri"/>
               </a:rPr>
-              <a:t>Clase 1 –</a:t>
+              <a:t>Sesión 1 –</a:t>
             </a:r>
             <a:r>
               <a:rPr sz="1600" b="0" i="0">
@@ -10146,7 +10200,7 @@
                 </a:solidFill>
                 <a:latin typeface="Calibri"/>
               </a:rPr>
-              <a:t> Diagnóstico · Revisión de Bases de Datos I (10/08)</a:t>
+              <a:t> Diagnóstico · Revisión de Bases de Datos I (24/08)</a:t>
             </a:r>
           </a:p>
           <a:p>
@@ -10171,7 +10225,7 @@
                 </a:solidFill>
                 <a:latin typeface="Calibri"/>
               </a:rPr>
-              <a:t>Clase 2 –</a:t>
+              <a:t>Sesión 2 –</a:t>
             </a:r>
             <a:r>
               <a:rPr sz="1600" b="0" i="0">
@@ -10180,7 +10234,7 @@
                 </a:solidFill>
                 <a:latin typeface="Calibri"/>
               </a:rPr>
-              <a:t> Administración de bases de datos (17/08) · Autónoma</a:t>
+              <a:t> Administración de bases de datos (31/08)</a:t>
             </a:r>
           </a:p>
           <a:p>
@@ -10205,7 +10259,7 @@
                 </a:solidFill>
                 <a:latin typeface="Calibri"/>
               </a:rPr>
-              <a:t>Clase 3 –</a:t>
+              <a:t>Sesión 3 –</a:t>
             </a:r>
             <a:r>
               <a:rPr sz="1600" b="0" i="0">
@@ -10214,7 +10268,7 @@
                 </a:solidFill>
                 <a:latin typeface="Calibri"/>
               </a:rPr>
-              <a:t> Procedimientos almacenados (24/08)</a:t>
+              <a:t> Procedimientos almacenados (07/09)</a:t>
             </a:r>
           </a:p>
           <a:p>
@@ -10239,7 +10293,7 @@
                 </a:solidFill>
                 <a:latin typeface="Calibri"/>
               </a:rPr>
-              <a:t>Clase 4 –</a:t>
+              <a:t>Sesión 4 –</a:t>
             </a:r>
             <a:r>
               <a:rPr sz="1600" b="0" i="0">
@@ -10248,7 +10302,7 @@
                 </a:solidFill>
                 <a:latin typeface="Calibri"/>
               </a:rPr>
-              <a:t> Funciones y disparadores · Seguridad y respaldo (31/08)</a:t>
+              <a:t> Funciones y disparadores · Seguridad y respaldo (14/09)</a:t>
             </a:r>
           </a:p>
           <a:p>
@@ -10273,7 +10327,7 @@
                 </a:solidFill>
                 <a:latin typeface="Calibri"/>
               </a:rPr>
-              <a:t>Clase 5 –</a:t>
+              <a:t>Sesión 5 –</a:t>
             </a:r>
             <a:r>
               <a:rPr sz="1600" b="0" i="0">
@@ -10282,7 +10336,7 @@
                 </a:solidFill>
                 <a:latin typeface="Calibri"/>
               </a:rPr>
-              <a:t> Parcial 1 (07/09)</a:t>
+              <a:t> Parcial 1 (21/09) · presencial · solo evaluación</a:t>
             </a:r>
           </a:p>
           <a:p>
@@ -10307,7 +10361,7 @@
                 </a:solidFill>
                 <a:latin typeface="Calibri"/>
               </a:rPr>
-              <a:t>Clase 6 –</a:t>
+              <a:t>Sesión 6 –</a:t>
             </a:r>
             <a:r>
               <a:rPr sz="1600" b="0" i="0">
@@ -10316,9 +10370,32 @@
                 </a:solidFill>
                 <a:latin typeface="Calibri"/>
               </a:rPr>
-              <a:t> Optimización de consultas (14/09)</a:t>
-            </a:r>
-          </a:p>
+              <a:t> Optimización de consultas (28/09)</a:t>
+            </a:r>
+          </a:p>
+        </p:txBody>
+      </p:sp>
+      <p:sp>
+        <p:nvSpPr>
+          <p:cNvPr id="7" name="TextBox 6"/>
+          <p:cNvSpPr txBox="1"/>
+          <p:nvPr/>
+        </p:nvSpPr>
+        <p:spPr>
+          <a:xfrm>
+            <a:off x="6187287" y="1453895"/>
+            <a:ext cx="5364327" cy="4946904"/>
+          </a:xfrm>
+          <a:prstGeom prst="rect">
+            <a:avLst/>
+          </a:prstGeom>
+          <a:noFill/>
+        </p:spPr>
+        <p:txBody>
+          <a:bodyPr wrap="square">
+            <a:spAutoFit/>
+          </a:bodyPr>
+          <a:lstStyle/>
           <a:p>
             <a:pPr>
               <a:spcAft>
@@ -10341,7 +10418,7 @@
                 </a:solidFill>
                 <a:latin typeface="Calibri"/>
               </a:rPr>
-              <a:t>Clase 7 –</a:t>
+              <a:t>Sesión 7 –</a:t>
             </a:r>
             <a:r>
               <a:rPr sz="1600" b="0" i="0">
@@ -10350,32 +10427,9 @@
                 </a:solidFill>
                 <a:latin typeface="Calibri"/>
               </a:rPr>
-              <a:t> Índices y particionamiento (21/09)</a:t>
-            </a:r>
-          </a:p>
-        </p:txBody>
-      </p:sp>
-      <p:sp>
-        <p:nvSpPr>
-          <p:cNvPr id="7" name="TextBox 6"/>
-          <p:cNvSpPr txBox="1"/>
-          <p:nvPr/>
-        </p:nvSpPr>
-        <p:spPr>
-          <a:xfrm>
-            <a:off x="6187287" y="1453895"/>
-            <a:ext cx="5364327" cy="4946904"/>
-          </a:xfrm>
-          <a:prstGeom prst="rect">
-            <a:avLst/>
-          </a:prstGeom>
-          <a:noFill/>
-        </p:spPr>
-        <p:txBody>
-          <a:bodyPr wrap="square">
-            <a:spAutoFit/>
-          </a:bodyPr>
-          <a:lstStyle/>
+              <a:t> Índices y particionamiento + Tuning y gestión de transacciones (05/10) · sesión doble · Clases 7+8</a:t>
+            </a:r>
+          </a:p>
           <a:p>
             <a:pPr>
               <a:spcAft>
@@ -10398,7 +10452,7 @@
                 </a:solidFill>
                 <a:latin typeface="Calibri"/>
               </a:rPr>
-              <a:t>Clase 8 –</a:t>
+              <a:t>Sesión 8 –</a:t>
             </a:r>
             <a:r>
               <a:rPr sz="1600" b="0" i="0">
@@ -10407,7 +10461,7 @@
                 </a:solidFill>
                 <a:latin typeface="Calibri"/>
               </a:rPr>
-              <a:t> Tuning de bases de datos · Gestión de transacciones (28/09)</a:t>
+              <a:t> Control de concurrencia (12/10) · Autónoma (festivo) · material Clase 10</a:t>
             </a:r>
           </a:p>
           <a:p>
@@ -10432,7 +10486,7 @@
                 </a:solidFill>
                 <a:latin typeface="Calibri"/>
               </a:rPr>
-              <a:t>Clase 9 –</a:t>
+              <a:t>Sesión 9 –</a:t>
             </a:r>
             <a:r>
               <a:rPr sz="1600" b="0" i="0">
@@ -10441,7 +10495,7 @@
                 </a:solidFill>
                 <a:latin typeface="Calibri"/>
               </a:rPr>
-              <a:t> Parcial 2 (05/10)</a:t>
+              <a:t> Parcial 2 (19/10) · presencial · solo evaluación</a:t>
             </a:r>
           </a:p>
           <a:p>
@@ -10466,7 +10520,7 @@
                 </a:solidFill>
                 <a:latin typeface="Calibri"/>
               </a:rPr>
-              <a:t>Clase 10 –</a:t>
+              <a:t>Sesión 10 –</a:t>
             </a:r>
             <a:r>
               <a:rPr sz="1600" b="0" i="0">
@@ -10475,7 +10529,7 @@
                 </a:solidFill>
                 <a:latin typeface="Calibri"/>
               </a:rPr>
-              <a:t> Control de concurrencia (12/10) · Autónoma</a:t>
+              <a:t> Avance del proyecto final + Integración de apps externas · Preparación final (26/10) · sesión doble · Clases 11+12</a:t>
             </a:r>
           </a:p>
           <a:p>
@@ -10500,7 +10554,7 @@
                 </a:solidFill>
                 <a:latin typeface="Calibri"/>
               </a:rPr>
-              <a:t>Clase 11 –</a:t>
+              <a:t>Sesión 11 –</a:t>
             </a:r>
             <a:r>
               <a:rPr sz="1600" b="0" i="0">
@@ -10509,7 +10563,7 @@
                 </a:solidFill>
                 <a:latin typeface="Calibri"/>
               </a:rPr>
-              <a:t> Avance del proyecto final (19/10)</a:t>
+              <a:t> Análisis de casos reales (02/11) · Autónoma (festivo) · material Clase 13</a:t>
             </a:r>
           </a:p>
           <a:p>
@@ -10534,7 +10588,7 @@
                 </a:solidFill>
                 <a:latin typeface="Calibri"/>
               </a:rPr>
-              <a:t>Clase 12 –</a:t>
+              <a:t>Sesión 12 –</a:t>
             </a:r>
             <a:r>
               <a:rPr sz="1600" b="0" i="0">
@@ -10543,7 +10597,7 @@
                 </a:solidFill>
                 <a:latin typeface="Calibri"/>
               </a:rPr>
-              <a:t> Integración de aplicaciones externas · Preparación de presentación final (26/10)</a:t>
+              <a:t> Parcial 3 (09/11) · presencial · solo evaluación</a:t>
             </a:r>
           </a:p>
           <a:p>
@@ -10568,7 +10622,7 @@
                 </a:solidFill>
                 <a:latin typeface="Calibri"/>
               </a:rPr>
-              <a:t>Clase 13 –</a:t>
+              <a:t>Sesión 13 –</a:t>
             </a:r>
             <a:r>
               <a:rPr sz="1600" b="0" i="0">
@@ -10577,75 +10631,7 @@
                 </a:solidFill>
                 <a:latin typeface="Calibri"/>
               </a:rPr>
-              <a:t> Análisis de casos reales (02/11) · Autónoma</a:t>
-            </a:r>
-          </a:p>
-          <a:p>
-            <a:pPr>
-              <a:spcAft>
-                <a:spcPts val="900"/>
-              </a:spcAft>
-            </a:pPr>
-            <a:r>
-              <a:rPr sz="1600" b="0" i="0">
-                <a:solidFill>
-                  <a:srgbClr val="333333"/>
-                </a:solidFill>
-                <a:latin typeface="Calibri"/>
-              </a:rPr>
-              <a:t>–   </a:t>
-            </a:r>
-            <a:r>
-              <a:rPr sz="1600" b="1" i="0">
-                <a:solidFill>
-                  <a:srgbClr val="333333"/>
-                </a:solidFill>
-                <a:latin typeface="Calibri"/>
-              </a:rPr>
-              <a:t>Clase 14 –</a:t>
-            </a:r>
-            <a:r>
-              <a:rPr sz="1600" b="0" i="0">
-                <a:solidFill>
-                  <a:srgbClr val="333333"/>
-                </a:solidFill>
-                <a:latin typeface="Calibri"/>
-              </a:rPr>
-              <a:t> Parcial 3 (09/11)</a:t>
-            </a:r>
-          </a:p>
-          <a:p>
-            <a:pPr>
-              <a:spcAft>
-                <a:spcPts val="900"/>
-              </a:spcAft>
-            </a:pPr>
-            <a:r>
-              <a:rPr sz="1600" b="0" i="0">
-                <a:solidFill>
-                  <a:srgbClr val="333333"/>
-                </a:solidFill>
-                <a:latin typeface="Calibri"/>
-              </a:rPr>
-              <a:t>–   </a:t>
-            </a:r>
-            <a:r>
-              <a:rPr sz="1600" b="1" i="0">
-                <a:solidFill>
-                  <a:srgbClr val="333333"/>
-                </a:solidFill>
-                <a:latin typeface="Calibri"/>
-              </a:rPr>
-              <a:t>Clase 15 –</a:t>
-            </a:r>
-            <a:r>
-              <a:rPr sz="1600" b="0" i="0">
-                <a:solidFill>
-                  <a:srgbClr val="333333"/>
-                </a:solidFill>
-                <a:latin typeface="Calibri"/>
-              </a:rPr>
-              <a:t> Presentación del proyecto + cierre (16/11) · Autónoma</a:t>
+              <a:t> Presentación del proyecto + cierre (16/11) · Sustentación del Proyecto Integrador · material Clase 15</a:t>
             </a:r>
           </a:p>
         </p:txBody>

--- a/Bases de Datos II/Clases/Presentacion del Curso - Bases de Datos II.pptx
+++ b/Bases de Datos II/Clases/Presentacion del Curso - Bases de Datos II.pptx
@@ -3406,7 +3406,7 @@
                 </a:solidFill>
                 <a:latin typeface="Calibri"/>
               </a:rPr>
-              <a:t>Presencialidad asistida</a:t>
+              <a:t>Virtual</a:t>
             </a:r>
           </a:p>
           <a:p>
@@ -4575,7 +4575,7 @@
                 </a:solidFill>
                 <a:latin typeface="Calibri"/>
               </a:rPr>
-              <a:t>Lunes 18:00 – 20:00 · Presencialidad asistida: Clase 1 y parciales presencial · resto virtual síncrona · festivos autónoma · Grupo 641A-2.</a:t>
+              <a:t>Lunes 18:00 – 20:00 · Virtual: todas las sesiones por Meet, incluidos la Sesión 1 y los parciales · festivos autónoma · Grupo 641A-2.</a:t>
             </a:r>
           </a:p>
         </p:txBody>
@@ -6338,7 +6338,7 @@
                 </a:solidFill>
                 <a:latin typeface="Calibri"/>
               </a:rPr>
-              <a:t> · Presencialidad asistida</a:t>
+              <a:t> · Virtual</a:t>
             </a:r>
           </a:p>
           <a:p>

--- a/Bases de Datos II/Clases/Presentacion del Curso - Bases de Datos II.pptx
+++ b/Bases de Datos II/Clases/Presentacion del Curso - Bases de Datos II.pptx
@@ -4136,7 +4136,7 @@
                 </a:solidFill>
                 <a:latin typeface="Calibri"/>
               </a:rPr>
-              <a:t> (https://examlab.lovable.app/): entrega de talleres + quices/parciales del curso.</a:t>
+              <a:t> (https://uniaj.examlab.workers.dev/): entrega de talleres + quices/parciales del curso.</a:t>
             </a:r>
           </a:p>
           <a:p>
@@ -8770,7 +8770,7 @@
                 </a:solidFill>
                 <a:latin typeface="Calibri"/>
               </a:rPr>
-              <a:t> (https://examlab.lovable.app/) — no es la plataforma oficial de la UNIAJC, la usamos solo para esto.</a:t>
+              <a:t> (https://uniaj.examlab.workers.dev/) — no es la plataforma oficial de la UNIAJC, la usamos solo para esto.</a:t>
             </a:r>
           </a:p>
           <a:p>

--- a/Bases de Datos II/Clases/Presentacion del Curso - Bases de Datos II.pptx
+++ b/Bases de Datos II/Clases/Presentacion del Curso - Bases de Datos II.pptx
@@ -5218,8 +5218,8 @@
         </p:blipFill>
         <p:spPr>
           <a:xfrm>
-            <a:off x="1743913" y="1792224"/>
-            <a:ext cx="1051560" cy="1051560"/>
+            <a:off x="1659331" y="1847087"/>
+            <a:ext cx="1220724" cy="1220724"/>
           </a:xfrm>
           <a:prstGeom prst="rect">
             <a:avLst/>
@@ -5234,8 +5234,8 @@
         </p:nvSpPr>
         <p:spPr>
           <a:xfrm>
-            <a:off x="530352" y="2916936"/>
-            <a:ext cx="3478682" cy="502920"/>
+            <a:off x="530352" y="3159251"/>
+            <a:ext cx="3478682" cy="621792"/>
           </a:xfrm>
           <a:prstGeom prst="rect">
             <a:avLst/>
@@ -5422,8 +5422,8 @@
         </p:blipFill>
         <p:spPr>
           <a:xfrm>
-            <a:off x="5570067" y="1792224"/>
-            <a:ext cx="1051560" cy="1051560"/>
+            <a:off x="5485485" y="1847087"/>
+            <a:ext cx="1220724" cy="1220724"/>
           </a:xfrm>
           <a:prstGeom prst="rect">
             <a:avLst/>
@@ -5438,8 +5438,8 @@
         </p:nvSpPr>
         <p:spPr>
           <a:xfrm>
-            <a:off x="4356506" y="2916936"/>
-            <a:ext cx="3478682" cy="502920"/>
+            <a:off x="4356506" y="3159251"/>
+            <a:ext cx="3478682" cy="621792"/>
           </a:xfrm>
           <a:prstGeom prst="rect">
             <a:avLst/>
@@ -5626,8 +5626,8 @@
         </p:blipFill>
         <p:spPr>
           <a:xfrm>
-            <a:off x="9396222" y="1792224"/>
-            <a:ext cx="1051560" cy="1051560"/>
+            <a:off x="9311640" y="1847087"/>
+            <a:ext cx="1220724" cy="1220724"/>
           </a:xfrm>
           <a:prstGeom prst="rect">
             <a:avLst/>
@@ -5642,8 +5642,8 @@
         </p:nvSpPr>
         <p:spPr>
           <a:xfrm>
-            <a:off x="8182660" y="2916936"/>
-            <a:ext cx="3478682" cy="502920"/>
+            <a:off x="8182660" y="3159251"/>
+            <a:ext cx="3478682" cy="621792"/>
           </a:xfrm>
           <a:prstGeom prst="rect">
             <a:avLst/>
@@ -5691,7 +5691,7 @@
         </p:nvSpPr>
         <p:spPr>
           <a:xfrm>
-            <a:off x="457200" y="4055364"/>
+            <a:off x="2370277" y="4055364"/>
             <a:ext cx="3624986" cy="2299716"/>
           </a:xfrm>
           <a:prstGeom prst="roundRect">
@@ -5736,7 +5736,7 @@
         </p:nvSpPr>
         <p:spPr>
           <a:xfrm>
-            <a:off x="457200" y="4055364"/>
+            <a:off x="2370277" y="4055364"/>
             <a:ext cx="3624986" cy="64008"/>
           </a:xfrm>
           <a:prstGeom prst="rect">
@@ -5779,7 +5779,7 @@
         </p:nvSpPr>
         <p:spPr>
           <a:xfrm>
-            <a:off x="457200" y="4119372"/>
+            <a:off x="2370277" y="4119372"/>
             <a:ext cx="3624986" cy="27432"/>
           </a:xfrm>
           <a:prstGeom prst="rect">
@@ -5830,8 +5830,8 @@
         </p:blipFill>
         <p:spPr>
           <a:xfrm>
-            <a:off x="1743913" y="4256532"/>
-            <a:ext cx="1051560" cy="1051560"/>
+            <a:off x="3572408" y="4311396"/>
+            <a:ext cx="1220724" cy="1220724"/>
           </a:xfrm>
           <a:prstGeom prst="rect">
             <a:avLst/>
@@ -5846,8 +5846,8 @@
         </p:nvSpPr>
         <p:spPr>
           <a:xfrm>
-            <a:off x="530352" y="5381244"/>
-            <a:ext cx="3478682" cy="502920"/>
+            <a:off x="2443429" y="5623560"/>
+            <a:ext cx="3478682" cy="621792"/>
           </a:xfrm>
           <a:prstGeom prst="rect">
             <a:avLst/>
@@ -5895,7 +5895,7 @@
         </p:nvSpPr>
         <p:spPr>
           <a:xfrm>
-            <a:off x="4283354" y="4055364"/>
+            <a:off x="6196431" y="4055364"/>
             <a:ext cx="3624986" cy="2299716"/>
           </a:xfrm>
           <a:prstGeom prst="roundRect">
@@ -5940,7 +5940,7 @@
         </p:nvSpPr>
         <p:spPr>
           <a:xfrm>
-            <a:off x="4283354" y="4055364"/>
+            <a:off x="6196431" y="4055364"/>
             <a:ext cx="3624986" cy="64008"/>
           </a:xfrm>
           <a:prstGeom prst="rect">
@@ -5983,7 +5983,7 @@
         </p:nvSpPr>
         <p:spPr>
           <a:xfrm>
-            <a:off x="4283354" y="4119372"/>
+            <a:off x="6196431" y="4119372"/>
             <a:ext cx="3624986" cy="27432"/>
           </a:xfrm>
           <a:prstGeom prst="rect">
@@ -6034,8 +6034,8 @@
         </p:blipFill>
         <p:spPr>
           <a:xfrm>
-            <a:off x="5570067" y="4256532"/>
-            <a:ext cx="1051560" cy="1051560"/>
+            <a:off x="7398562" y="4311396"/>
+            <a:ext cx="1220724" cy="1220724"/>
           </a:xfrm>
           <a:prstGeom prst="rect">
             <a:avLst/>
@@ -6050,8 +6050,8 @@
         </p:nvSpPr>
         <p:spPr>
           <a:xfrm>
-            <a:off x="4356506" y="5381244"/>
-            <a:ext cx="3478682" cy="502920"/>
+            <a:off x="6269583" y="5623560"/>
+            <a:ext cx="3478682" cy="621792"/>
           </a:xfrm>
           <a:prstGeom prst="rect">
             <a:avLst/>

--- a/Bases de Datos II/Clases/Presentacion del Curso - Bases de Datos II.pptx
+++ b/Bases de Datos II/Clases/Presentacion del Curso - Bases de Datos II.pptx
@@ -19,6 +19,7 @@
     <p:sldId id="267" r:id="rId18"/>
     <p:sldId id="268" r:id="rId19"/>
     <p:sldId id="269" r:id="rId20"/>
+    <p:sldId id="270" r:id="rId21"/>
   </p:sldIdLst>
   <p:sldSz cx="12191695" cy="6858000" type="screen4x3"/>
   <p:notesSz cx="6858000" cy="9144000"/>
@@ -3939,7 +3940,7 @@
         <p:spPr>
           <a:xfrm>
             <a:off x="0" y="0"/>
-            <a:ext cx="12191695" cy="960120"/>
+            <a:ext cx="12191695" cy="1170432"/>
           </a:xfrm>
           <a:prstGeom prst="rect">
             <a:avLst/>
@@ -3981,7 +3982,7 @@
         </p:nvSpPr>
         <p:spPr>
           <a:xfrm>
-            <a:off x="0" y="960120"/>
+            <a:off x="0" y="1170432"/>
             <a:ext cx="12191695" cy="41148"/>
           </a:xfrm>
           <a:prstGeom prst="rect">
@@ -4025,7 +4026,7 @@
         <p:spPr>
           <a:xfrm>
             <a:off x="457200" y="164592"/>
-            <a:ext cx="11277295" cy="502920"/>
+            <a:ext cx="11277295" cy="384048"/>
           </a:xfrm>
           <a:prstGeom prst="rect">
             <a:avLst/>
@@ -4045,7 +4046,7 @@
                 </a:solidFill>
                 <a:latin typeface="Calibri"/>
               </a:rPr>
-              <a:t>Recursos</a:t>
+              <a:t>El cliente · Clínica Veterinaria «Huellitas»</a:t>
             </a:r>
           </a:p>
         </p:txBody>
@@ -4058,8 +4059,42 @@
         </p:nvSpPr>
         <p:spPr>
           <a:xfrm>
-            <a:off x="457200" y="1170432"/>
-            <a:ext cx="11277295" cy="5230368"/>
+            <a:off x="457200" y="566928"/>
+            <a:ext cx="11277295" cy="411480"/>
+          </a:xfrm>
+          <a:prstGeom prst="rect">
+            <a:avLst/>
+          </a:prstGeom>
+          <a:noFill/>
+        </p:spPr>
+        <p:txBody>
+          <a:bodyPr wrap="square">
+            <a:spAutoFit/>
+          </a:bodyPr>
+          <a:lstStyle/>
+          <a:p>
+            <a:r>
+              <a:rPr sz="1400" b="0" i="0">
+                <a:solidFill>
+                  <a:srgbClr val="B8D8EE"/>
+                </a:solidFill>
+                <a:latin typeface="Calibri"/>
+              </a:rPr>
+              <a:t>«Huellitas» es la clínica (el cliente) · «VetCare DB» es la base de datos que usted construye para ella</a:t>
+            </a:r>
+          </a:p>
+        </p:txBody>
+      </p:sp>
+      <p:sp>
+        <p:nvSpPr>
+          <p:cNvPr id="6" name="TextBox 5"/>
+          <p:cNvSpPr txBox="1"/>
+          <p:nvPr/>
+        </p:nvSpPr>
+        <p:spPr>
+          <a:xfrm>
+            <a:off x="457200" y="1380744"/>
+            <a:ext cx="11277295" cy="5020056"/>
           </a:xfrm>
           <a:prstGeom prst="rect">
             <a:avLst/>
@@ -4084,7 +4119,7 @@
                 </a:solidFill>
                 <a:latin typeface="Calibri"/>
               </a:rPr>
-              <a:t>–   Herramientas </a:t>
+              <a:t>–   Atiende un </a:t>
             </a:r>
             <a:r>
               <a:rPr sz="1600" b="1" i="0">
@@ -4093,7 +4128,7 @@
                 </a:solidFill>
                 <a:latin typeface="Calibri"/>
               </a:rPr>
-              <a:t>gratis en navegador</a:t>
+              <a:t>alto volumen de pacientes</a:t>
             </a:r>
             <a:r>
               <a:rPr sz="1600" b="0" i="0">
@@ -4102,7 +4137,25 @@
                 </a:solidFill>
                 <a:latin typeface="Calibri"/>
               </a:rPr>
-              <a:t> (sin instalacion de SGBD local) — detalle en Plan de curso (pendiente aprobacion docente).</a:t>
+              <a:t> y hoy lleva toda su gestión en </a:t>
+            </a:r>
+            <a:r>
+              <a:rPr sz="1600" b="1" i="0">
+                <a:solidFill>
+                  <a:srgbClr val="333333"/>
+                </a:solidFill>
+                <a:latin typeface="Calibri"/>
+              </a:rPr>
+              <a:t>carpetas de papel</a:t>
+            </a:r>
+            <a:r>
+              <a:rPr sz="1600" b="0" i="0">
+                <a:solidFill>
+                  <a:srgbClr val="333333"/>
+                </a:solidFill>
+                <a:latin typeface="Calibri"/>
+              </a:rPr>
+              <a:t>. La administración reporta tres problemas:</a:t>
             </a:r>
           </a:p>
           <a:p>
@@ -4118,7 +4171,7 @@
                 </a:solidFill>
                 <a:latin typeface="Calibri"/>
               </a:rPr>
-              <a:t>–   </a:t>
+              <a:t>–   Se </a:t>
             </a:r>
             <a:r>
               <a:rPr sz="1600" b="1" i="0">
@@ -4127,7 +4180,7 @@
                 </a:solidFill>
                 <a:latin typeface="Calibri"/>
               </a:rPr>
-              <a:t>ExamLab</a:t>
+              <a:t>extravían fichas</a:t>
             </a:r>
             <a:r>
               <a:rPr sz="1600" b="0" i="0">
@@ -4136,7 +4189,7 @@
                 </a:solidFill>
                 <a:latin typeface="Calibri"/>
               </a:rPr>
-              <a:t> (https://uniaj.examlab.workers.dev/): entrega de talleres + quices/parciales del curso.</a:t>
+              <a:t> de pacientes: el expediente existe en un solo papel.</a:t>
             </a:r>
           </a:p>
           <a:p>
@@ -4152,7 +4205,7 @@
                 </a:solidFill>
                 <a:latin typeface="Calibri"/>
               </a:rPr>
-              <a:t>–   SQL: </a:t>
+              <a:t>–   Buscar un historial en el archivo físico </a:t>
             </a:r>
             <a:r>
               <a:rPr sz="1600" b="1" i="0">
@@ -4161,7 +4214,7 @@
                 </a:solidFill>
                 <a:latin typeface="Calibri"/>
               </a:rPr>
-              <a:t>DB Fiddle</a:t>
+              <a:t>genera filas</a:t>
             </a:r>
             <a:r>
               <a:rPr sz="1600" b="0" i="0">
@@ -4170,25 +4223,7 @@
                 </a:solidFill>
                 <a:latin typeface="Calibri"/>
               </a:rPr>
-              <a:t> / SQLTest.online · PL/SQL: </a:t>
-            </a:r>
-            <a:r>
-              <a:rPr sz="1600" b="1" i="0">
-                <a:solidFill>
-                  <a:srgbClr val="333333"/>
-                </a:solidFill>
-                <a:latin typeface="Calibri"/>
-              </a:rPr>
-              <a:t>Oracle Live SQL</a:t>
-            </a:r>
-            <a:r>
-              <a:rPr sz="1600" b="0" i="0">
-                <a:solidFill>
-                  <a:srgbClr val="333333"/>
-                </a:solidFill>
-                <a:latin typeface="Calibri"/>
-              </a:rPr>
-              <a:t>.</a:t>
+              <a:t> en la sala de espera.</a:t>
             </a:r>
           </a:p>
           <a:p>
@@ -4204,7 +4239,7 @@
                 </a:solidFill>
                 <a:latin typeface="Calibri"/>
               </a:rPr>
-              <a:t>–   Modelos ER: </a:t>
+              <a:t>–   </a:t>
             </a:r>
             <a:r>
               <a:rPr sz="1600" b="1" i="0">
@@ -4213,7 +4248,7 @@
                 </a:solidFill>
                 <a:latin typeface="Calibri"/>
               </a:rPr>
-              <a:t>draw.io / diagrams.net</a:t>
+              <a:t>No hay métricas</a:t>
             </a:r>
             <a:r>
               <a:rPr sz="1600" b="0" i="0">
@@ -4222,25 +4257,7 @@
                 </a:solidFill>
                 <a:latin typeface="Calibri"/>
               </a:rPr>
-              <a:t> · bocetos: </a:t>
-            </a:r>
-            <a:r>
-              <a:rPr sz="1600" b="1" i="0">
-                <a:solidFill>
-                  <a:srgbClr val="333333"/>
-                </a:solidFill>
-                <a:latin typeface="Calibri"/>
-              </a:rPr>
-              <a:t>Excalidraw</a:t>
-            </a:r>
-            <a:r>
-              <a:rPr sz="1600" b="0" i="0">
-                <a:solidFill>
-                  <a:srgbClr val="333333"/>
-                </a:solidFill>
-                <a:latin typeface="Calibri"/>
-              </a:rPr>
-              <a:t>.</a:t>
+              <a:t>: no saben cuántas especies atienden al mes.</a:t>
             </a:r>
           </a:p>
           <a:p>
@@ -4256,14 +4273,50 @@
                 </a:solidFill>
                 <a:latin typeface="Calibri"/>
               </a:rPr>
-              <a:t>–   Bibliografia: Coronel &amp; Morris · Date · Oracle PL/SQL Docs.</a:t>
-            </a:r>
-          </a:p>
-        </p:txBody>
-      </p:sp>
-      <p:sp>
-        <p:nvSpPr>
-          <p:cNvPr id="6" name="TextBox 5"/>
+              <a:t>–   </a:t>
+            </a:r>
+            <a:r>
+              <a:rPr sz="1600" b="1" i="0">
+                <a:solidFill>
+                  <a:srgbClr val="333333"/>
+                </a:solidFill>
+                <a:latin typeface="Calibri"/>
+              </a:rPr>
+              <a:t>Su parte en este curso:</a:t>
+            </a:r>
+            <a:r>
+              <a:rPr sz="1600" b="0" i="0">
+                <a:solidFill>
+                  <a:srgbClr val="333333"/>
+                </a:solidFill>
+                <a:latin typeface="Calibri"/>
+              </a:rPr>
+              <a:t> la </a:t>
+            </a:r>
+            <a:r>
+              <a:rPr sz="1600" b="1" i="0">
+                <a:solidFill>
+                  <a:srgbClr val="333333"/>
+                </a:solidFill>
+                <a:latin typeface="Calibri"/>
+              </a:rPr>
+              <a:t>capa de datos</a:t>
+            </a:r>
+            <a:r>
+              <a:rPr sz="1600" b="0" i="0">
+                <a:solidFill>
+                  <a:srgbClr val="333333"/>
+                </a:solidFill>
+                <a:latin typeface="Calibri"/>
+              </a:rPr>
+              <a:t> de VetCare — modelo, integridad, seguridad y rendimiento. La aplicación y la interfaz no se piden en esta asignatura.</a:t>
+            </a:r>
+          </a:p>
+        </p:txBody>
+      </p:sp>
+      <p:sp>
+        <p:nvSpPr>
+          <p:cNvPr id="7" name="TextBox 6"/>
           <p:cNvSpPr txBox="1"/>
           <p:nvPr/>
         </p:nvSpPr>
@@ -4437,109 +4490,21 @@
                 </a:solidFill>
                 <a:latin typeface="Calibri"/>
               </a:rPr>
-              <a:t>Acuerdos importantes</a:t>
-            </a:r>
-          </a:p>
-        </p:txBody>
-      </p:sp>
-      <p:sp>
-        <p:nvSpPr>
-          <p:cNvPr id="5" name="Rounded Rectangle 4"/>
-          <p:cNvSpPr/>
-          <p:nvPr/>
-        </p:nvSpPr>
-        <p:spPr>
-          <a:xfrm>
-            <a:off x="457200" y="1261872"/>
-            <a:ext cx="11277295" cy="1051560"/>
-          </a:xfrm>
-          <a:prstGeom prst="roundRect">
-            <a:avLst>
-              <a:gd name="adj" fmla="val 12000"/>
-            </a:avLst>
-          </a:prstGeom>
-          <a:solidFill>
-            <a:srgbClr val="E8F4FA"/>
-          </a:solidFill>
-          <a:ln>
-            <a:noFill/>
-          </a:ln>
-        </p:spPr>
-        <p:style>
-          <a:lnRef idx="1">
-            <a:schemeClr val="accent1"/>
-          </a:lnRef>
-          <a:fillRef idx="3">
-            <a:schemeClr val="accent1"/>
-          </a:fillRef>
-          <a:effectRef idx="2">
-            <a:schemeClr val="accent1"/>
-          </a:effectRef>
-          <a:fontRef idx="minor">
-            <a:schemeClr val="lt1"/>
-          </a:fontRef>
-        </p:style>
-        <p:txBody>
-          <a:bodyPr rtlCol="0" anchor="ctr"/>
-          <a:lstStyle/>
-          <a:p>
-            <a:pPr algn="ctr"/>
-          </a:p>
-        </p:txBody>
-      </p:sp>
-      <p:sp>
-        <p:nvSpPr>
-          <p:cNvPr id="6" name="Rectangle 5"/>
-          <p:cNvSpPr/>
-          <p:nvPr/>
-        </p:nvSpPr>
-        <p:spPr>
-          <a:xfrm>
-            <a:off x="457200" y="1261872"/>
-            <a:ext cx="128016" cy="1051560"/>
-          </a:xfrm>
-          <a:prstGeom prst="rect">
-            <a:avLst/>
-          </a:prstGeom>
-          <a:solidFill>
-            <a:srgbClr val="269CCB"/>
-          </a:solidFill>
-          <a:ln>
-            <a:noFill/>
-          </a:ln>
-        </p:spPr>
-        <p:style>
-          <a:lnRef idx="1">
-            <a:schemeClr val="accent1"/>
-          </a:lnRef>
-          <a:fillRef idx="3">
-            <a:schemeClr val="accent1"/>
-          </a:fillRef>
-          <a:effectRef idx="2">
-            <a:schemeClr val="accent1"/>
-          </a:effectRef>
-          <a:fontRef idx="minor">
-            <a:schemeClr val="lt1"/>
-          </a:fontRef>
-        </p:style>
-        <p:txBody>
-          <a:bodyPr rtlCol="0" anchor="ctr"/>
-          <a:lstStyle/>
-          <a:p>
-            <a:pPr algn="ctr"/>
-          </a:p>
-        </p:txBody>
-      </p:sp>
-      <p:sp>
-        <p:nvSpPr>
-          <p:cNvPr id="7" name="TextBox 6"/>
+              <a:t>Recursos</a:t>
+            </a:r>
+          </a:p>
+        </p:txBody>
+      </p:sp>
+      <p:sp>
+        <p:nvSpPr>
+          <p:cNvPr id="5" name="TextBox 4"/>
           <p:cNvSpPr txBox="1"/>
           <p:nvPr/>
         </p:nvSpPr>
         <p:spPr>
           <a:xfrm>
-            <a:off x="777240" y="1399031"/>
-            <a:ext cx="10774375" cy="822959"/>
+            <a:off x="457200" y="1170432"/>
+            <a:ext cx="11277295" cy="5230368"/>
           </a:xfrm>
           <a:prstGeom prst="rect">
             <a:avLst/>
@@ -4552,313 +4517,198 @@
           </a:bodyPr>
           <a:lstStyle/>
           <a:p>
-            <a:r>
-              <a:rPr sz="1200" b="1" i="0">
-                <a:solidFill>
-                  <a:srgbClr val="269CCB"/>
-                </a:solidFill>
-                <a:latin typeface="Calibri"/>
-              </a:rPr>
-              <a:t>Info</a:t>
-            </a:r>
-          </a:p>
-          <a:p>
             <a:pPr>
-              <a:spcBef>
-                <a:spcPts val="400"/>
-              </a:spcBef>
+              <a:spcAft>
+                <a:spcPts val="800"/>
+              </a:spcAft>
             </a:pPr>
             <a:r>
-              <a:rPr sz="1400" b="0" i="0">
-                <a:solidFill>
-                  <a:srgbClr val="333333"/>
-                </a:solidFill>
-                <a:latin typeface="Calibri"/>
-              </a:rPr>
-              <a:t>Lunes 18:00 – 20:00 · Virtual: todas las sesiones por Meet, incluidos la Sesión 1 y los parciales · festivos autónoma · Grupo 641A-2.</a:t>
-            </a:r>
-          </a:p>
-        </p:txBody>
-      </p:sp>
-      <p:sp>
-        <p:nvSpPr>
-          <p:cNvPr id="8" name="Rounded Rectangle 7"/>
-          <p:cNvSpPr/>
-          <p:nvPr/>
-        </p:nvSpPr>
-        <p:spPr>
-          <a:xfrm>
-            <a:off x="457200" y="2478024"/>
-            <a:ext cx="11277295" cy="1051560"/>
-          </a:xfrm>
-          <a:prstGeom prst="roundRect">
-            <a:avLst>
-              <a:gd name="adj" fmla="val 12000"/>
-            </a:avLst>
-          </a:prstGeom>
-          <a:solidFill>
-            <a:srgbClr val="FFF8E1"/>
-          </a:solidFill>
-          <a:ln>
-            <a:noFill/>
-          </a:ln>
-        </p:spPr>
-        <p:style>
-          <a:lnRef idx="1">
-            <a:schemeClr val="accent1"/>
-          </a:lnRef>
-          <a:fillRef idx="3">
-            <a:schemeClr val="accent1"/>
-          </a:fillRef>
-          <a:effectRef idx="2">
-            <a:schemeClr val="accent1"/>
-          </a:effectRef>
-          <a:fontRef idx="minor">
-            <a:schemeClr val="lt1"/>
-          </a:fontRef>
-        </p:style>
-        <p:txBody>
-          <a:bodyPr rtlCol="0" anchor="ctr"/>
-          <a:lstStyle/>
-          <a:p>
-            <a:pPr algn="ctr"/>
-          </a:p>
-        </p:txBody>
-      </p:sp>
-      <p:sp>
-        <p:nvSpPr>
-          <p:cNvPr id="9" name="Rectangle 8"/>
-          <p:cNvSpPr/>
-          <p:nvPr/>
-        </p:nvSpPr>
-        <p:spPr>
-          <a:xfrm>
-            <a:off x="457200" y="2478024"/>
-            <a:ext cx="128016" cy="1051560"/>
-          </a:xfrm>
-          <a:prstGeom prst="rect">
-            <a:avLst/>
-          </a:prstGeom>
-          <a:solidFill>
-            <a:srgbClr val="FFD000"/>
-          </a:solidFill>
-          <a:ln>
-            <a:noFill/>
-          </a:ln>
-        </p:spPr>
-        <p:style>
-          <a:lnRef idx="1">
-            <a:schemeClr val="accent1"/>
-          </a:lnRef>
-          <a:fillRef idx="3">
-            <a:schemeClr val="accent1"/>
-          </a:fillRef>
-          <a:effectRef idx="2">
-            <a:schemeClr val="accent1"/>
-          </a:effectRef>
-          <a:fontRef idx="minor">
-            <a:schemeClr val="lt1"/>
-          </a:fontRef>
-        </p:style>
-        <p:txBody>
-          <a:bodyPr rtlCol="0" anchor="ctr"/>
-          <a:lstStyle/>
-          <a:p>
-            <a:pPr algn="ctr"/>
-          </a:p>
-        </p:txBody>
-      </p:sp>
-      <p:sp>
-        <p:nvSpPr>
-          <p:cNvPr id="10" name="TextBox 9"/>
-          <p:cNvSpPr txBox="1"/>
-          <p:nvPr/>
-        </p:nvSpPr>
-        <p:spPr>
-          <a:xfrm>
-            <a:off x="777240" y="2615184"/>
-            <a:ext cx="10774375" cy="822959"/>
-          </a:xfrm>
-          <a:prstGeom prst="rect">
-            <a:avLst/>
-          </a:prstGeom>
-          <a:noFill/>
-        </p:spPr>
-        <p:txBody>
-          <a:bodyPr wrap="square">
-            <a:spAutoFit/>
-          </a:bodyPr>
-          <a:lstStyle/>
-          <a:p>
-            <a:r>
-              <a:rPr sz="1200" b="1" i="0">
-                <a:solidFill>
-                  <a:srgbClr val="FFD000"/>
-                </a:solidFill>
-                <a:latin typeface="Calibri"/>
-              </a:rPr>
-              <a:t>Aclaración</a:t>
+              <a:rPr sz="1600" b="0" i="0">
+                <a:solidFill>
+                  <a:srgbClr val="333333"/>
+                </a:solidFill>
+                <a:latin typeface="Calibri"/>
+              </a:rPr>
+              <a:t>–   Herramientas </a:t>
+            </a:r>
+            <a:r>
+              <a:rPr sz="1600" b="1" i="0">
+                <a:solidFill>
+                  <a:srgbClr val="333333"/>
+                </a:solidFill>
+                <a:latin typeface="Calibri"/>
+              </a:rPr>
+              <a:t>gratis en navegador</a:t>
+            </a:r>
+            <a:r>
+              <a:rPr sz="1600" b="0" i="0">
+                <a:solidFill>
+                  <a:srgbClr val="333333"/>
+                </a:solidFill>
+                <a:latin typeface="Calibri"/>
+              </a:rPr>
+              <a:t> (sin instalacion de SGBD local) — detalle en Plan de curso (pendiente aprobacion docente).</a:t>
             </a:r>
           </a:p>
           <a:p>
             <a:pPr>
-              <a:spcBef>
-                <a:spcPts val="400"/>
-              </a:spcBef>
+              <a:spcAft>
+                <a:spcPts val="800"/>
+              </a:spcAft>
             </a:pPr>
             <a:r>
-              <a:rPr sz="1400" b="0" i="0">
-                <a:solidFill>
-                  <a:srgbClr val="333333"/>
-                </a:solidFill>
-                <a:latin typeface="Calibri"/>
-              </a:rPr>
-              <a:t>Día 1: Sesión 0 (Presentación del curso, archivo aparte) + Clase 1 (diagnóstico + revisión BD I). Festivos = autónoma con actividad en ExamLab.</a:t>
-            </a:r>
-          </a:p>
-        </p:txBody>
-      </p:sp>
-      <p:sp>
-        <p:nvSpPr>
-          <p:cNvPr id="11" name="Rounded Rectangle 10"/>
-          <p:cNvSpPr/>
-          <p:nvPr/>
-        </p:nvSpPr>
-        <p:spPr>
-          <a:xfrm>
-            <a:off x="457200" y="3694176"/>
-            <a:ext cx="11277295" cy="1051560"/>
-          </a:xfrm>
-          <a:prstGeom prst="roundRect">
-            <a:avLst>
-              <a:gd name="adj" fmla="val 12000"/>
-            </a:avLst>
-          </a:prstGeom>
-          <a:solidFill>
-            <a:srgbClr val="FBE4E4"/>
-          </a:solidFill>
-          <a:ln>
-            <a:noFill/>
-          </a:ln>
-        </p:spPr>
-        <p:style>
-          <a:lnRef idx="1">
-            <a:schemeClr val="accent1"/>
-          </a:lnRef>
-          <a:fillRef idx="3">
-            <a:schemeClr val="accent1"/>
-          </a:fillRef>
-          <a:effectRef idx="2">
-            <a:schemeClr val="accent1"/>
-          </a:effectRef>
-          <a:fontRef idx="minor">
-            <a:schemeClr val="lt1"/>
-          </a:fontRef>
-        </p:style>
-        <p:txBody>
-          <a:bodyPr rtlCol="0" anchor="ctr"/>
-          <a:lstStyle/>
-          <a:p>
-            <a:pPr algn="ctr"/>
-          </a:p>
-        </p:txBody>
-      </p:sp>
-      <p:sp>
-        <p:nvSpPr>
-          <p:cNvPr id="12" name="Rectangle 11"/>
-          <p:cNvSpPr/>
-          <p:nvPr/>
-        </p:nvSpPr>
-        <p:spPr>
-          <a:xfrm>
-            <a:off x="457200" y="3694176"/>
-            <a:ext cx="128016" cy="1051560"/>
-          </a:xfrm>
-          <a:prstGeom prst="rect">
-            <a:avLst/>
-          </a:prstGeom>
-          <a:solidFill>
-            <a:srgbClr val="A02030"/>
-          </a:solidFill>
-          <a:ln>
-            <a:noFill/>
-          </a:ln>
-        </p:spPr>
-        <p:style>
-          <a:lnRef idx="1">
-            <a:schemeClr val="accent1"/>
-          </a:lnRef>
-          <a:fillRef idx="3">
-            <a:schemeClr val="accent1"/>
-          </a:fillRef>
-          <a:effectRef idx="2">
-            <a:schemeClr val="accent1"/>
-          </a:effectRef>
-          <a:fontRef idx="minor">
-            <a:schemeClr val="lt1"/>
-          </a:fontRef>
-        </p:style>
-        <p:txBody>
-          <a:bodyPr rtlCol="0" anchor="ctr"/>
-          <a:lstStyle/>
-          <a:p>
-            <a:pPr algn="ctr"/>
-          </a:p>
-        </p:txBody>
-      </p:sp>
-      <p:sp>
-        <p:nvSpPr>
-          <p:cNvPr id="13" name="TextBox 12"/>
-          <p:cNvSpPr txBox="1"/>
-          <p:nvPr/>
-        </p:nvSpPr>
-        <p:spPr>
-          <a:xfrm>
-            <a:off x="777240" y="3831336"/>
-            <a:ext cx="10774375" cy="822959"/>
-          </a:xfrm>
-          <a:prstGeom prst="rect">
-            <a:avLst/>
-          </a:prstGeom>
-          <a:noFill/>
-        </p:spPr>
-        <p:txBody>
-          <a:bodyPr wrap="square">
-            <a:spAutoFit/>
-          </a:bodyPr>
-          <a:lstStyle/>
-          <a:p>
-            <a:r>
-              <a:rPr sz="1200" b="1" i="0">
-                <a:solidFill>
-                  <a:srgbClr val="A02030"/>
-                </a:solidFill>
-                <a:latin typeface="Calibri"/>
-              </a:rPr>
-              <a:t>Atención</a:t>
+              <a:rPr sz="1600" b="0" i="0">
+                <a:solidFill>
+                  <a:srgbClr val="333333"/>
+                </a:solidFill>
+                <a:latin typeface="Calibri"/>
+              </a:rPr>
+              <a:t>–   </a:t>
+            </a:r>
+            <a:r>
+              <a:rPr sz="1600" b="1" i="0">
+                <a:solidFill>
+                  <a:srgbClr val="333333"/>
+                </a:solidFill>
+                <a:latin typeface="Calibri"/>
+              </a:rPr>
+              <a:t>ExamLab</a:t>
+            </a:r>
+            <a:r>
+              <a:rPr sz="1600" b="0" i="0">
+                <a:solidFill>
+                  <a:srgbClr val="333333"/>
+                </a:solidFill>
+                <a:latin typeface="Calibri"/>
+              </a:rPr>
+              <a:t> (https://uniaj.examlab.workers.dev/): entrega de talleres + quices/parciales del curso.</a:t>
             </a:r>
           </a:p>
           <a:p>
             <a:pPr>
-              <a:spcBef>
-                <a:spcPts val="400"/>
-              </a:spcBef>
+              <a:spcAft>
+                <a:spcPts val="800"/>
+              </a:spcAft>
             </a:pPr>
             <a:r>
-              <a:rPr sz="1400" b="0" i="0">
-                <a:solidFill>
-                  <a:srgbClr val="333333"/>
-                </a:solidFill>
-                <a:latin typeface="Calibri"/>
-              </a:rPr>
-              <a:t>Parciales NUNCA en autonoma: P1=sesión 5 (21/09), P2=sesión 9 (19/10), P3=sesión 12 (09/11). La sesión 13 (16/11) es de sustentación del PI VetCare.</a:t>
-            </a:r>
-          </a:p>
-        </p:txBody>
-      </p:sp>
-      <p:sp>
-        <p:nvSpPr>
-          <p:cNvPr id="14" name="TextBox 13"/>
+              <a:rPr sz="1600" b="0" i="0">
+                <a:solidFill>
+                  <a:srgbClr val="333333"/>
+                </a:solidFill>
+                <a:latin typeface="Calibri"/>
+              </a:rPr>
+              <a:t>–   SQL: </a:t>
+            </a:r>
+            <a:r>
+              <a:rPr sz="1600" b="1" i="0">
+                <a:solidFill>
+                  <a:srgbClr val="333333"/>
+                </a:solidFill>
+                <a:latin typeface="Calibri"/>
+              </a:rPr>
+              <a:t>DB Fiddle</a:t>
+            </a:r>
+            <a:r>
+              <a:rPr sz="1600" b="0" i="0">
+                <a:solidFill>
+                  <a:srgbClr val="333333"/>
+                </a:solidFill>
+                <a:latin typeface="Calibri"/>
+              </a:rPr>
+              <a:t> / SQLTest.online · PL/SQL: </a:t>
+            </a:r>
+            <a:r>
+              <a:rPr sz="1600" b="1" i="0">
+                <a:solidFill>
+                  <a:srgbClr val="333333"/>
+                </a:solidFill>
+                <a:latin typeface="Calibri"/>
+              </a:rPr>
+              <a:t>Oracle Live SQL</a:t>
+            </a:r>
+            <a:r>
+              <a:rPr sz="1600" b="0" i="0">
+                <a:solidFill>
+                  <a:srgbClr val="333333"/>
+                </a:solidFill>
+                <a:latin typeface="Calibri"/>
+              </a:rPr>
+              <a:t>.</a:t>
+            </a:r>
+          </a:p>
+          <a:p>
+            <a:pPr>
+              <a:spcAft>
+                <a:spcPts val="800"/>
+              </a:spcAft>
+            </a:pPr>
+            <a:r>
+              <a:rPr sz="1600" b="0" i="0">
+                <a:solidFill>
+                  <a:srgbClr val="333333"/>
+                </a:solidFill>
+                <a:latin typeface="Calibri"/>
+              </a:rPr>
+              <a:t>–   Modelos ER: </a:t>
+            </a:r>
+            <a:r>
+              <a:rPr sz="1600" b="1" i="0">
+                <a:solidFill>
+                  <a:srgbClr val="333333"/>
+                </a:solidFill>
+                <a:latin typeface="Calibri"/>
+              </a:rPr>
+              <a:t>draw.io / diagrams.net</a:t>
+            </a:r>
+            <a:r>
+              <a:rPr sz="1600" b="0" i="0">
+                <a:solidFill>
+                  <a:srgbClr val="333333"/>
+                </a:solidFill>
+                <a:latin typeface="Calibri"/>
+              </a:rPr>
+              <a:t> · bocetos: </a:t>
+            </a:r>
+            <a:r>
+              <a:rPr sz="1600" b="1" i="0">
+                <a:solidFill>
+                  <a:srgbClr val="333333"/>
+                </a:solidFill>
+                <a:latin typeface="Calibri"/>
+              </a:rPr>
+              <a:t>Excalidraw</a:t>
+            </a:r>
+            <a:r>
+              <a:rPr sz="1600" b="0" i="0">
+                <a:solidFill>
+                  <a:srgbClr val="333333"/>
+                </a:solidFill>
+                <a:latin typeface="Calibri"/>
+              </a:rPr>
+              <a:t>.</a:t>
+            </a:r>
+          </a:p>
+          <a:p>
+            <a:pPr>
+              <a:spcAft>
+                <a:spcPts val="800"/>
+              </a:spcAft>
+            </a:pPr>
+            <a:r>
+              <a:rPr sz="1600" b="0" i="0">
+                <a:solidFill>
+                  <a:srgbClr val="333333"/>
+                </a:solidFill>
+                <a:latin typeface="Calibri"/>
+              </a:rPr>
+              <a:t>–   Bibliografia: Coronel &amp; Morris · Date · Oracle PL/SQL Docs.</a:t>
+            </a:r>
+          </a:p>
+        </p:txBody>
+      </p:sp>
+      <p:sp>
+        <p:nvSpPr>
+          <p:cNvPr id="6" name="TextBox 5"/>
           <p:cNvSpPr txBox="1"/>
           <p:nvPr/>
         </p:nvSpPr>
@@ -4926,7 +4776,7 @@
         <p:spPr>
           <a:xfrm>
             <a:off x="0" y="0"/>
-            <a:ext cx="12191695" cy="1170432"/>
+            <a:ext cx="12191695" cy="960120"/>
           </a:xfrm>
           <a:prstGeom prst="rect">
             <a:avLst/>
@@ -4968,7 +4818,7 @@
         </p:nvSpPr>
         <p:spPr>
           <a:xfrm>
-            <a:off x="0" y="1170432"/>
+            <a:off x="0" y="960120"/>
             <a:ext cx="12191695" cy="41148"/>
           </a:xfrm>
           <a:prstGeom prst="rect">
@@ -5012,7 +4862,7 @@
         <p:spPr>
           <a:xfrm>
             <a:off x="457200" y="164592"/>
-            <a:ext cx="11277295" cy="384048"/>
+            <a:ext cx="11277295" cy="502920"/>
           </a:xfrm>
           <a:prstGeom prst="rect">
             <a:avLst/>
@@ -5032,55 +4882,21 @@
                 </a:solidFill>
                 <a:latin typeface="Calibri"/>
               </a:rPr>
-              <a:t>Herramientas del curso</a:t>
-            </a:r>
-          </a:p>
-        </p:txBody>
-      </p:sp>
-      <p:sp>
-        <p:nvSpPr>
-          <p:cNvPr id="5" name="TextBox 4"/>
-          <p:cNvSpPr txBox="1"/>
-          <p:nvPr/>
-        </p:nvSpPr>
-        <p:spPr>
-          <a:xfrm>
-            <a:off x="457200" y="566928"/>
-            <a:ext cx="11277295" cy="411480"/>
-          </a:xfrm>
-          <a:prstGeom prst="rect">
-            <a:avLst/>
-          </a:prstGeom>
-          <a:noFill/>
-        </p:spPr>
-        <p:txBody>
-          <a:bodyPr wrap="square">
-            <a:spAutoFit/>
-          </a:bodyPr>
-          <a:lstStyle/>
-          <a:p>
-            <a:r>
-              <a:rPr sz="1400" b="0" i="0">
-                <a:solidFill>
-                  <a:srgbClr val="B8D8EE"/>
-                </a:solidFill>
-                <a:latin typeface="Calibri"/>
-              </a:rPr>
-              <a:t>Gratis en navegador · SQL + diagramas ER + entrega/evaluación</a:t>
-            </a:r>
-          </a:p>
-        </p:txBody>
-      </p:sp>
-      <p:sp>
-        <p:nvSpPr>
-          <p:cNvPr id="6" name="Rounded Rectangle 5"/>
+              <a:t>Acuerdos importantes</a:t>
+            </a:r>
+          </a:p>
+        </p:txBody>
+      </p:sp>
+      <p:sp>
+        <p:nvSpPr>
+          <p:cNvPr id="5" name="Rounded Rectangle 4"/>
           <p:cNvSpPr/>
           <p:nvPr/>
         </p:nvSpPr>
         <p:spPr>
           <a:xfrm>
-            <a:off x="457200" y="1591056"/>
-            <a:ext cx="3624986" cy="2299716"/>
+            <a:off x="457200" y="1261872"/>
+            <a:ext cx="11277295" cy="1051560"/>
           </a:xfrm>
           <a:prstGeom prst="roundRect">
             <a:avLst>
@@ -5088,7 +4904,7 @@
             </a:avLst>
           </a:prstGeom>
           <a:solidFill>
-            <a:srgbClr val="F2F2F2"/>
+            <a:srgbClr val="E8F4FA"/>
           </a:solidFill>
           <a:ln>
             <a:noFill/>
@@ -5118,20 +4934,20 @@
       </p:sp>
       <p:sp>
         <p:nvSpPr>
-          <p:cNvPr id="7" name="Rectangle 6"/>
+          <p:cNvPr id="6" name="Rectangle 5"/>
           <p:cNvSpPr/>
           <p:nvPr/>
         </p:nvSpPr>
         <p:spPr>
           <a:xfrm>
-            <a:off x="457200" y="1591056"/>
-            <a:ext cx="3624986" cy="64008"/>
+            <a:off x="457200" y="1261872"/>
+            <a:ext cx="128016" cy="1051560"/>
           </a:xfrm>
           <a:prstGeom prst="rect">
             <a:avLst/>
           </a:prstGeom>
           <a:solidFill>
-            <a:srgbClr val="095292"/>
+            <a:srgbClr val="269CCB"/>
           </a:solidFill>
           <a:ln>
             <a:noFill/>
@@ -5161,14 +4977,109 @@
       </p:sp>
       <p:sp>
         <p:nvSpPr>
-          <p:cNvPr id="8" name="Rectangle 7"/>
+          <p:cNvPr id="7" name="TextBox 6"/>
+          <p:cNvSpPr txBox="1"/>
+          <p:nvPr/>
+        </p:nvSpPr>
+        <p:spPr>
+          <a:xfrm>
+            <a:off x="777240" y="1399031"/>
+            <a:ext cx="10774375" cy="822959"/>
+          </a:xfrm>
+          <a:prstGeom prst="rect">
+            <a:avLst/>
+          </a:prstGeom>
+          <a:noFill/>
+        </p:spPr>
+        <p:txBody>
+          <a:bodyPr wrap="square">
+            <a:spAutoFit/>
+          </a:bodyPr>
+          <a:lstStyle/>
+          <a:p>
+            <a:r>
+              <a:rPr sz="1200" b="1" i="0">
+                <a:solidFill>
+                  <a:srgbClr val="269CCB"/>
+                </a:solidFill>
+                <a:latin typeface="Calibri"/>
+              </a:rPr>
+              <a:t>Info</a:t>
+            </a:r>
+          </a:p>
+          <a:p>
+            <a:pPr>
+              <a:spcBef>
+                <a:spcPts val="400"/>
+              </a:spcBef>
+            </a:pPr>
+            <a:r>
+              <a:rPr sz="1400" b="0" i="0">
+                <a:solidFill>
+                  <a:srgbClr val="333333"/>
+                </a:solidFill>
+                <a:latin typeface="Calibri"/>
+              </a:rPr>
+              <a:t>Lunes 18:00 – 20:00 · Virtual: todas las sesiones por Meet, incluidos la Sesión 1 y los parciales · festivos autónoma · Grupo 641A-2.</a:t>
+            </a:r>
+          </a:p>
+        </p:txBody>
+      </p:sp>
+      <p:sp>
+        <p:nvSpPr>
+          <p:cNvPr id="8" name="Rounded Rectangle 7"/>
           <p:cNvSpPr/>
           <p:nvPr/>
         </p:nvSpPr>
         <p:spPr>
           <a:xfrm>
-            <a:off x="457200" y="1655064"/>
-            <a:ext cx="3624986" cy="27432"/>
+            <a:off x="457200" y="2478024"/>
+            <a:ext cx="11277295" cy="1051560"/>
+          </a:xfrm>
+          <a:prstGeom prst="roundRect">
+            <a:avLst>
+              <a:gd name="adj" fmla="val 12000"/>
+            </a:avLst>
+          </a:prstGeom>
+          <a:solidFill>
+            <a:srgbClr val="FFF8E1"/>
+          </a:solidFill>
+          <a:ln>
+            <a:noFill/>
+          </a:ln>
+        </p:spPr>
+        <p:style>
+          <a:lnRef idx="1">
+            <a:schemeClr val="accent1"/>
+          </a:lnRef>
+          <a:fillRef idx="3">
+            <a:schemeClr val="accent1"/>
+          </a:fillRef>
+          <a:effectRef idx="2">
+            <a:schemeClr val="accent1"/>
+          </a:effectRef>
+          <a:fontRef idx="minor">
+            <a:schemeClr val="lt1"/>
+          </a:fontRef>
+        </p:style>
+        <p:txBody>
+          <a:bodyPr rtlCol="0" anchor="ctr"/>
+          <a:lstStyle/>
+          <a:p>
+            <a:pPr algn="ctr"/>
+          </a:p>
+        </p:txBody>
+      </p:sp>
+      <p:sp>
+        <p:nvSpPr>
+          <p:cNvPr id="9" name="Rectangle 8"/>
+          <p:cNvSpPr/>
+          <p:nvPr/>
+        </p:nvSpPr>
+        <p:spPr>
+          <a:xfrm>
+            <a:off x="457200" y="2478024"/>
+            <a:ext cx="128016" cy="1051560"/>
           </a:xfrm>
           <a:prstGeom prst="rect">
             <a:avLst/>
@@ -5202,30 +5113,6 @@
           </a:p>
         </p:txBody>
       </p:sp>
-      <p:pic>
-        <p:nvPicPr>
-          <p:cNvPr id="9" name="Picture 8" descr="dbfiddle.png"/>
-          <p:cNvPicPr>
-            <a:picLocks noChangeAspect="1"/>
-          </p:cNvPicPr>
-          <p:nvPr/>
-        </p:nvPicPr>
-        <p:blipFill>
-          <a:blip r:embed="rId2"/>
-          <a:stretch>
-            <a:fillRect/>
-          </a:stretch>
-        </p:blipFill>
-        <p:spPr>
-          <a:xfrm>
-            <a:off x="1659331" y="1847087"/>
-            <a:ext cx="1220724" cy="1220724"/>
-          </a:xfrm>
-          <a:prstGeom prst="rect">
-            <a:avLst/>
-          </a:prstGeom>
-        </p:spPr>
-      </p:pic>
       <p:sp>
         <p:nvSpPr>
           <p:cNvPr id="10" name="TextBox 9"/>
@@ -5234,8 +5121,8 @@
         </p:nvSpPr>
         <p:spPr>
           <a:xfrm>
-            <a:off x="530352" y="3159251"/>
-            <a:ext cx="3478682" cy="621792"/>
+            <a:off x="777240" y="2615184"/>
+            <a:ext cx="10774375" cy="822959"/>
           </a:xfrm>
           <a:prstGeom prst="rect">
             <a:avLst/>
@@ -5243,34 +5130,35 @@
           <a:noFill/>
         </p:spPr>
         <p:txBody>
-          <a:bodyPr wrap="square" anchor="t"/>
-          <a:lstStyle/>
-          <a:p>
-            <a:pPr algn="ctr"/>
-            <a:r>
-              <a:rPr sz="1300" b="1" i="0">
-                <a:solidFill>
-                  <a:srgbClr val="095292"/>
-                </a:solidFill>
-                <a:latin typeface="Calibri"/>
-              </a:rPr>
-              <a:t>DB Fiddle</a:t>
-            </a:r>
-          </a:p>
-          <a:p>
-            <a:pPr algn="ctr">
+          <a:bodyPr wrap="square">
+            <a:spAutoFit/>
+          </a:bodyPr>
+          <a:lstStyle/>
+          <a:p>
+            <a:r>
+              <a:rPr sz="1200" b="1" i="0">
+                <a:solidFill>
+                  <a:srgbClr val="FFD000"/>
+                </a:solidFill>
+                <a:latin typeface="Calibri"/>
+              </a:rPr>
+              <a:t>Aclaración</a:t>
+            </a:r>
+          </a:p>
+          <a:p>
+            <a:pPr>
               <a:spcBef>
-                <a:spcPts val="200"/>
+                <a:spcPts val="400"/>
               </a:spcBef>
             </a:pPr>
             <a:r>
-              <a:rPr sz="1000" b="0" i="0">
-                <a:solidFill>
-                  <a:srgbClr val="666666"/>
-                </a:solidFill>
-                <a:latin typeface="Calibri"/>
-              </a:rPr>
-              <a:t>SQL práctico</a:t>
+              <a:rPr sz="1400" b="0" i="0">
+                <a:solidFill>
+                  <a:srgbClr val="333333"/>
+                </a:solidFill>
+                <a:latin typeface="Calibri"/>
+              </a:rPr>
+              <a:t>Día 1: Sesión 0 (Presentación del curso, archivo aparte) + Clase 1 (diagnóstico + revisión BD I). Festivos = autónoma con actividad en ExamLab.</a:t>
             </a:r>
           </a:p>
         </p:txBody>
@@ -5283,8 +5171,8 @@
         </p:nvSpPr>
         <p:spPr>
           <a:xfrm>
-            <a:off x="4283354" y="1591056"/>
-            <a:ext cx="3624986" cy="2299716"/>
+            <a:off x="457200" y="3694176"/>
+            <a:ext cx="11277295" cy="1051560"/>
           </a:xfrm>
           <a:prstGeom prst="roundRect">
             <a:avLst>
@@ -5292,7 +5180,7 @@
             </a:avLst>
           </a:prstGeom>
           <a:solidFill>
-            <a:srgbClr val="F2F2F2"/>
+            <a:srgbClr val="FBE4E4"/>
           </a:solidFill>
           <a:ln>
             <a:noFill/>
@@ -5328,14 +5216,14 @@
         </p:nvSpPr>
         <p:spPr>
           <a:xfrm>
-            <a:off x="4283354" y="1591056"/>
-            <a:ext cx="3624986" cy="64008"/>
+            <a:off x="457200" y="3694176"/>
+            <a:ext cx="128016" cy="1051560"/>
           </a:xfrm>
           <a:prstGeom prst="rect">
             <a:avLst/>
           </a:prstGeom>
           <a:solidFill>
-            <a:srgbClr val="095292"/>
+            <a:srgbClr val="A02030"/>
           </a:solidFill>
           <a:ln>
             <a:noFill/>
@@ -5365,81 +5253,14 @@
       </p:sp>
       <p:sp>
         <p:nvSpPr>
-          <p:cNvPr id="13" name="Rectangle 12"/>
-          <p:cNvSpPr/>
-          <p:nvPr/>
-        </p:nvSpPr>
-        <p:spPr>
-          <a:xfrm>
-            <a:off x="4283354" y="1655064"/>
-            <a:ext cx="3624986" cy="27432"/>
-          </a:xfrm>
-          <a:prstGeom prst="rect">
-            <a:avLst/>
-          </a:prstGeom>
-          <a:solidFill>
-            <a:srgbClr val="FFD000"/>
-          </a:solidFill>
-          <a:ln>
-            <a:noFill/>
-          </a:ln>
-        </p:spPr>
-        <p:style>
-          <a:lnRef idx="1">
-            <a:schemeClr val="accent1"/>
-          </a:lnRef>
-          <a:fillRef idx="3">
-            <a:schemeClr val="accent1"/>
-          </a:fillRef>
-          <a:effectRef idx="2">
-            <a:schemeClr val="accent1"/>
-          </a:effectRef>
-          <a:fontRef idx="minor">
-            <a:schemeClr val="lt1"/>
-          </a:fontRef>
-        </p:style>
-        <p:txBody>
-          <a:bodyPr rtlCol="0" anchor="ctr"/>
-          <a:lstStyle/>
-          <a:p>
-            <a:pPr algn="ctr"/>
-          </a:p>
-        </p:txBody>
-      </p:sp>
-      <p:pic>
-        <p:nvPicPr>
-          <p:cNvPr id="14" name="Picture 13" descr="oracle_livesql.png"/>
-          <p:cNvPicPr>
-            <a:picLocks noChangeAspect="1"/>
-          </p:cNvPicPr>
-          <p:nvPr/>
-        </p:nvPicPr>
-        <p:blipFill>
-          <a:blip r:embed="rId3"/>
-          <a:stretch>
-            <a:fillRect/>
-          </a:stretch>
-        </p:blipFill>
-        <p:spPr>
-          <a:xfrm>
-            <a:off x="5485485" y="1847087"/>
-            <a:ext cx="1220724" cy="1220724"/>
-          </a:xfrm>
-          <a:prstGeom prst="rect">
-            <a:avLst/>
-          </a:prstGeom>
-        </p:spPr>
-      </p:pic>
-      <p:sp>
-        <p:nvSpPr>
-          <p:cNvPr id="15" name="TextBox 14"/>
+          <p:cNvPr id="13" name="TextBox 12"/>
           <p:cNvSpPr txBox="1"/>
           <p:nvPr/>
         </p:nvSpPr>
         <p:spPr>
           <a:xfrm>
-            <a:off x="4356506" y="3159251"/>
-            <a:ext cx="3478682" cy="621792"/>
+            <a:off x="777240" y="3831336"/>
+            <a:ext cx="10774375" cy="822959"/>
           </a:xfrm>
           <a:prstGeom prst="rect">
             <a:avLst/>
@@ -5447,653 +5268,42 @@
           <a:noFill/>
         </p:spPr>
         <p:txBody>
-          <a:bodyPr wrap="square" anchor="t"/>
-          <a:lstStyle/>
-          <a:p>
-            <a:pPr algn="ctr"/>
-            <a:r>
-              <a:rPr sz="1300" b="1" i="0">
-                <a:solidFill>
-                  <a:srgbClr val="095292"/>
-                </a:solidFill>
-                <a:latin typeface="Calibri"/>
-              </a:rPr>
-              <a:t>Oracle Live SQL</a:t>
-            </a:r>
-          </a:p>
-          <a:p>
-            <a:pPr algn="ctr">
+          <a:bodyPr wrap="square">
+            <a:spAutoFit/>
+          </a:bodyPr>
+          <a:lstStyle/>
+          <a:p>
+            <a:r>
+              <a:rPr sz="1200" b="1" i="0">
+                <a:solidFill>
+                  <a:srgbClr val="A02030"/>
+                </a:solidFill>
+                <a:latin typeface="Calibri"/>
+              </a:rPr>
+              <a:t>Atención</a:t>
+            </a:r>
+          </a:p>
+          <a:p>
+            <a:pPr>
               <a:spcBef>
-                <a:spcPts val="200"/>
+                <a:spcPts val="400"/>
               </a:spcBef>
             </a:pPr>
             <a:r>
-              <a:rPr sz="1000" b="0" i="0">
-                <a:solidFill>
-                  <a:srgbClr val="666666"/>
-                </a:solidFill>
-                <a:latin typeface="Calibri"/>
-              </a:rPr>
-              <a:t>PL/SQL · cuenta free</a:t>
-            </a:r>
-          </a:p>
-        </p:txBody>
-      </p:sp>
-      <p:sp>
-        <p:nvSpPr>
-          <p:cNvPr id="16" name="Rounded Rectangle 15"/>
-          <p:cNvSpPr/>
-          <p:nvPr/>
-        </p:nvSpPr>
-        <p:spPr>
-          <a:xfrm>
-            <a:off x="8109508" y="1591056"/>
-            <a:ext cx="3624986" cy="2299716"/>
-          </a:xfrm>
-          <a:prstGeom prst="roundRect">
-            <a:avLst>
-              <a:gd name="adj" fmla="val 12000"/>
-            </a:avLst>
-          </a:prstGeom>
-          <a:solidFill>
-            <a:srgbClr val="F2F2F2"/>
-          </a:solidFill>
-          <a:ln>
-            <a:noFill/>
-          </a:ln>
-        </p:spPr>
-        <p:style>
-          <a:lnRef idx="1">
-            <a:schemeClr val="accent1"/>
-          </a:lnRef>
-          <a:fillRef idx="3">
-            <a:schemeClr val="accent1"/>
-          </a:fillRef>
-          <a:effectRef idx="2">
-            <a:schemeClr val="accent1"/>
-          </a:effectRef>
-          <a:fontRef idx="minor">
-            <a:schemeClr val="lt1"/>
-          </a:fontRef>
-        </p:style>
-        <p:txBody>
-          <a:bodyPr rtlCol="0" anchor="ctr"/>
-          <a:lstStyle/>
-          <a:p>
-            <a:pPr algn="ctr"/>
-          </a:p>
-        </p:txBody>
-      </p:sp>
-      <p:sp>
-        <p:nvSpPr>
-          <p:cNvPr id="17" name="Rectangle 16"/>
-          <p:cNvSpPr/>
-          <p:nvPr/>
-        </p:nvSpPr>
-        <p:spPr>
-          <a:xfrm>
-            <a:off x="8109508" y="1591056"/>
-            <a:ext cx="3624986" cy="64008"/>
-          </a:xfrm>
-          <a:prstGeom prst="rect">
-            <a:avLst/>
-          </a:prstGeom>
-          <a:solidFill>
-            <a:srgbClr val="095292"/>
-          </a:solidFill>
-          <a:ln>
-            <a:noFill/>
-          </a:ln>
-        </p:spPr>
-        <p:style>
-          <a:lnRef idx="1">
-            <a:schemeClr val="accent1"/>
-          </a:lnRef>
-          <a:fillRef idx="3">
-            <a:schemeClr val="accent1"/>
-          </a:fillRef>
-          <a:effectRef idx="2">
-            <a:schemeClr val="accent1"/>
-          </a:effectRef>
-          <a:fontRef idx="minor">
-            <a:schemeClr val="lt1"/>
-          </a:fontRef>
-        </p:style>
-        <p:txBody>
-          <a:bodyPr rtlCol="0" anchor="ctr"/>
-          <a:lstStyle/>
-          <a:p>
-            <a:pPr algn="ctr"/>
-          </a:p>
-        </p:txBody>
-      </p:sp>
-      <p:sp>
-        <p:nvSpPr>
-          <p:cNvPr id="18" name="Rectangle 17"/>
-          <p:cNvSpPr/>
-          <p:nvPr/>
-        </p:nvSpPr>
-        <p:spPr>
-          <a:xfrm>
-            <a:off x="8109508" y="1655064"/>
-            <a:ext cx="3624986" cy="27432"/>
-          </a:xfrm>
-          <a:prstGeom prst="rect">
-            <a:avLst/>
-          </a:prstGeom>
-          <a:solidFill>
-            <a:srgbClr val="FFD000"/>
-          </a:solidFill>
-          <a:ln>
-            <a:noFill/>
-          </a:ln>
-        </p:spPr>
-        <p:style>
-          <a:lnRef idx="1">
-            <a:schemeClr val="accent1"/>
-          </a:lnRef>
-          <a:fillRef idx="3">
-            <a:schemeClr val="accent1"/>
-          </a:fillRef>
-          <a:effectRef idx="2">
-            <a:schemeClr val="accent1"/>
-          </a:effectRef>
-          <a:fontRef idx="minor">
-            <a:schemeClr val="lt1"/>
-          </a:fontRef>
-        </p:style>
-        <p:txBody>
-          <a:bodyPr rtlCol="0" anchor="ctr"/>
-          <a:lstStyle/>
-          <a:p>
-            <a:pPr algn="ctr"/>
-          </a:p>
-        </p:txBody>
-      </p:sp>
-      <p:pic>
-        <p:nvPicPr>
-          <p:cNvPr id="19" name="Picture 18" descr="drawio.png"/>
-          <p:cNvPicPr>
-            <a:picLocks noChangeAspect="1"/>
-          </p:cNvPicPr>
-          <p:nvPr/>
-        </p:nvPicPr>
-        <p:blipFill>
-          <a:blip r:embed="rId4"/>
-          <a:stretch>
-            <a:fillRect/>
-          </a:stretch>
-        </p:blipFill>
-        <p:spPr>
-          <a:xfrm>
-            <a:off x="9311640" y="1847087"/>
-            <a:ext cx="1220724" cy="1220724"/>
-          </a:xfrm>
-          <a:prstGeom prst="rect">
-            <a:avLst/>
-          </a:prstGeom>
-        </p:spPr>
-      </p:pic>
-      <p:sp>
-        <p:nvSpPr>
-          <p:cNvPr id="20" name="TextBox 19"/>
-          <p:cNvSpPr txBox="1"/>
-          <p:nvPr/>
-        </p:nvSpPr>
-        <p:spPr>
-          <a:xfrm>
-            <a:off x="8182660" y="3159251"/>
-            <a:ext cx="3478682" cy="621792"/>
-          </a:xfrm>
-          <a:prstGeom prst="rect">
-            <a:avLst/>
-          </a:prstGeom>
-          <a:noFill/>
-        </p:spPr>
-        <p:txBody>
-          <a:bodyPr wrap="square" anchor="t"/>
-          <a:lstStyle/>
-          <a:p>
-            <a:pPr algn="ctr"/>
-            <a:r>
-              <a:rPr sz="1300" b="1" i="0">
-                <a:solidFill>
-                  <a:srgbClr val="095292"/>
-                </a:solidFill>
-                <a:latin typeface="Calibri"/>
-              </a:rPr>
-              <a:t>draw.io</a:t>
-            </a:r>
-          </a:p>
-          <a:p>
-            <a:pPr algn="ctr">
-              <a:spcBef>
-                <a:spcPts val="200"/>
-              </a:spcBef>
-            </a:pPr>
-            <a:r>
-              <a:rPr sz="1000" b="0" i="0">
-                <a:solidFill>
-                  <a:srgbClr val="666666"/>
-                </a:solidFill>
-                <a:latin typeface="Calibri"/>
-              </a:rPr>
-              <a:t>Modelos ER</a:t>
-            </a:r>
-          </a:p>
-        </p:txBody>
-      </p:sp>
-      <p:sp>
-        <p:nvSpPr>
-          <p:cNvPr id="21" name="Rounded Rectangle 20"/>
-          <p:cNvSpPr/>
-          <p:nvPr/>
-        </p:nvSpPr>
-        <p:spPr>
-          <a:xfrm>
-            <a:off x="2370277" y="4055364"/>
-            <a:ext cx="3624986" cy="2299716"/>
-          </a:xfrm>
-          <a:prstGeom prst="roundRect">
-            <a:avLst>
-              <a:gd name="adj" fmla="val 12000"/>
-            </a:avLst>
-          </a:prstGeom>
-          <a:solidFill>
-            <a:srgbClr val="F2F2F2"/>
-          </a:solidFill>
-          <a:ln>
-            <a:noFill/>
-          </a:ln>
-        </p:spPr>
-        <p:style>
-          <a:lnRef idx="1">
-            <a:schemeClr val="accent1"/>
-          </a:lnRef>
-          <a:fillRef idx="3">
-            <a:schemeClr val="accent1"/>
-          </a:fillRef>
-          <a:effectRef idx="2">
-            <a:schemeClr val="accent1"/>
-          </a:effectRef>
-          <a:fontRef idx="minor">
-            <a:schemeClr val="lt1"/>
-          </a:fontRef>
-        </p:style>
-        <p:txBody>
-          <a:bodyPr rtlCol="0" anchor="ctr"/>
-          <a:lstStyle/>
-          <a:p>
-            <a:pPr algn="ctr"/>
-          </a:p>
-        </p:txBody>
-      </p:sp>
-      <p:sp>
-        <p:nvSpPr>
-          <p:cNvPr id="22" name="Rectangle 21"/>
-          <p:cNvSpPr/>
-          <p:nvPr/>
-        </p:nvSpPr>
-        <p:spPr>
-          <a:xfrm>
-            <a:off x="2370277" y="4055364"/>
-            <a:ext cx="3624986" cy="64008"/>
-          </a:xfrm>
-          <a:prstGeom prst="rect">
-            <a:avLst/>
-          </a:prstGeom>
-          <a:solidFill>
-            <a:srgbClr val="095292"/>
-          </a:solidFill>
-          <a:ln>
-            <a:noFill/>
-          </a:ln>
-        </p:spPr>
-        <p:style>
-          <a:lnRef idx="1">
-            <a:schemeClr val="accent1"/>
-          </a:lnRef>
-          <a:fillRef idx="3">
-            <a:schemeClr val="accent1"/>
-          </a:fillRef>
-          <a:effectRef idx="2">
-            <a:schemeClr val="accent1"/>
-          </a:effectRef>
-          <a:fontRef idx="minor">
-            <a:schemeClr val="lt1"/>
-          </a:fontRef>
-        </p:style>
-        <p:txBody>
-          <a:bodyPr rtlCol="0" anchor="ctr"/>
-          <a:lstStyle/>
-          <a:p>
-            <a:pPr algn="ctr"/>
-          </a:p>
-        </p:txBody>
-      </p:sp>
-      <p:sp>
-        <p:nvSpPr>
-          <p:cNvPr id="23" name="Rectangle 22"/>
-          <p:cNvSpPr/>
-          <p:nvPr/>
-        </p:nvSpPr>
-        <p:spPr>
-          <a:xfrm>
-            <a:off x="2370277" y="4119372"/>
-            <a:ext cx="3624986" cy="27432"/>
-          </a:xfrm>
-          <a:prstGeom prst="rect">
-            <a:avLst/>
-          </a:prstGeom>
-          <a:solidFill>
-            <a:srgbClr val="FFD000"/>
-          </a:solidFill>
-          <a:ln>
-            <a:noFill/>
-          </a:ln>
-        </p:spPr>
-        <p:style>
-          <a:lnRef idx="1">
-            <a:schemeClr val="accent1"/>
-          </a:lnRef>
-          <a:fillRef idx="3">
-            <a:schemeClr val="accent1"/>
-          </a:fillRef>
-          <a:effectRef idx="2">
-            <a:schemeClr val="accent1"/>
-          </a:effectRef>
-          <a:fontRef idx="minor">
-            <a:schemeClr val="lt1"/>
-          </a:fontRef>
-        </p:style>
-        <p:txBody>
-          <a:bodyPr rtlCol="0" anchor="ctr"/>
-          <a:lstStyle/>
-          <a:p>
-            <a:pPr algn="ctr"/>
-          </a:p>
-        </p:txBody>
-      </p:sp>
-      <p:pic>
-        <p:nvPicPr>
-          <p:cNvPr id="24" name="Picture 23" descr="sqltest.png"/>
-          <p:cNvPicPr>
-            <a:picLocks noChangeAspect="1"/>
-          </p:cNvPicPr>
-          <p:nvPr/>
-        </p:nvPicPr>
-        <p:blipFill>
-          <a:blip r:embed="rId5"/>
-          <a:stretch>
-            <a:fillRect/>
-          </a:stretch>
-        </p:blipFill>
-        <p:spPr>
-          <a:xfrm>
-            <a:off x="3572408" y="4311396"/>
-            <a:ext cx="1220724" cy="1220724"/>
-          </a:xfrm>
-          <a:prstGeom prst="rect">
-            <a:avLst/>
-          </a:prstGeom>
-        </p:spPr>
-      </p:pic>
-      <p:sp>
-        <p:nvSpPr>
-          <p:cNvPr id="25" name="TextBox 24"/>
-          <p:cNvSpPr txBox="1"/>
-          <p:nvPr/>
-        </p:nvSpPr>
-        <p:spPr>
-          <a:xfrm>
-            <a:off x="2443429" y="5623560"/>
-            <a:ext cx="3478682" cy="621792"/>
-          </a:xfrm>
-          <a:prstGeom prst="rect">
-            <a:avLst/>
-          </a:prstGeom>
-          <a:noFill/>
-        </p:spPr>
-        <p:txBody>
-          <a:bodyPr wrap="square" anchor="t"/>
-          <a:lstStyle/>
-          <a:p>
-            <a:pPr algn="ctr"/>
-            <a:r>
-              <a:rPr sz="1300" b="1" i="0">
-                <a:solidFill>
-                  <a:srgbClr val="095292"/>
-                </a:solidFill>
-                <a:latin typeface="Calibri"/>
-              </a:rPr>
-              <a:t>SQLTest.online</a:t>
-            </a:r>
-          </a:p>
-          <a:p>
-            <a:pPr algn="ctr">
-              <a:spcBef>
-                <a:spcPts val="200"/>
-              </a:spcBef>
-            </a:pPr>
-            <a:r>
-              <a:rPr sz="1000" b="0" i="0">
-                <a:solidFill>
-                  <a:srgbClr val="666666"/>
-                </a:solidFill>
-                <a:latin typeface="Calibri"/>
-              </a:rPr>
-              <a:t>Multi-motor</a:t>
-            </a:r>
-          </a:p>
-        </p:txBody>
-      </p:sp>
-      <p:sp>
-        <p:nvSpPr>
-          <p:cNvPr id="26" name="Rounded Rectangle 25"/>
-          <p:cNvSpPr/>
-          <p:nvPr/>
-        </p:nvSpPr>
-        <p:spPr>
-          <a:xfrm>
-            <a:off x="6196431" y="4055364"/>
-            <a:ext cx="3624986" cy="2299716"/>
-          </a:xfrm>
-          <a:prstGeom prst="roundRect">
-            <a:avLst>
-              <a:gd name="adj" fmla="val 12000"/>
-            </a:avLst>
-          </a:prstGeom>
-          <a:solidFill>
-            <a:srgbClr val="F2F2F2"/>
-          </a:solidFill>
-          <a:ln>
-            <a:noFill/>
-          </a:ln>
-        </p:spPr>
-        <p:style>
-          <a:lnRef idx="1">
-            <a:schemeClr val="accent1"/>
-          </a:lnRef>
-          <a:fillRef idx="3">
-            <a:schemeClr val="accent1"/>
-          </a:fillRef>
-          <a:effectRef idx="2">
-            <a:schemeClr val="accent1"/>
-          </a:effectRef>
-          <a:fontRef idx="minor">
-            <a:schemeClr val="lt1"/>
-          </a:fontRef>
-        </p:style>
-        <p:txBody>
-          <a:bodyPr rtlCol="0" anchor="ctr"/>
-          <a:lstStyle/>
-          <a:p>
-            <a:pPr algn="ctr"/>
-          </a:p>
-        </p:txBody>
-      </p:sp>
-      <p:sp>
-        <p:nvSpPr>
-          <p:cNvPr id="27" name="Rectangle 26"/>
-          <p:cNvSpPr/>
-          <p:nvPr/>
-        </p:nvSpPr>
-        <p:spPr>
-          <a:xfrm>
-            <a:off x="6196431" y="4055364"/>
-            <a:ext cx="3624986" cy="64008"/>
-          </a:xfrm>
-          <a:prstGeom prst="rect">
-            <a:avLst/>
-          </a:prstGeom>
-          <a:solidFill>
-            <a:srgbClr val="095292"/>
-          </a:solidFill>
-          <a:ln>
-            <a:noFill/>
-          </a:ln>
-        </p:spPr>
-        <p:style>
-          <a:lnRef idx="1">
-            <a:schemeClr val="accent1"/>
-          </a:lnRef>
-          <a:fillRef idx="3">
-            <a:schemeClr val="accent1"/>
-          </a:fillRef>
-          <a:effectRef idx="2">
-            <a:schemeClr val="accent1"/>
-          </a:effectRef>
-          <a:fontRef idx="minor">
-            <a:schemeClr val="lt1"/>
-          </a:fontRef>
-        </p:style>
-        <p:txBody>
-          <a:bodyPr rtlCol="0" anchor="ctr"/>
-          <a:lstStyle/>
-          <a:p>
-            <a:pPr algn="ctr"/>
-          </a:p>
-        </p:txBody>
-      </p:sp>
-      <p:sp>
-        <p:nvSpPr>
-          <p:cNvPr id="28" name="Rectangle 27"/>
-          <p:cNvSpPr/>
-          <p:nvPr/>
-        </p:nvSpPr>
-        <p:spPr>
-          <a:xfrm>
-            <a:off x="6196431" y="4119372"/>
-            <a:ext cx="3624986" cy="27432"/>
-          </a:xfrm>
-          <a:prstGeom prst="rect">
-            <a:avLst/>
-          </a:prstGeom>
-          <a:solidFill>
-            <a:srgbClr val="FFD000"/>
-          </a:solidFill>
-          <a:ln>
-            <a:noFill/>
-          </a:ln>
-        </p:spPr>
-        <p:style>
-          <a:lnRef idx="1">
-            <a:schemeClr val="accent1"/>
-          </a:lnRef>
-          <a:fillRef idx="3">
-            <a:schemeClr val="accent1"/>
-          </a:fillRef>
-          <a:effectRef idx="2">
-            <a:schemeClr val="accent1"/>
-          </a:effectRef>
-          <a:fontRef idx="minor">
-            <a:schemeClr val="lt1"/>
-          </a:fontRef>
-        </p:style>
-        <p:txBody>
-          <a:bodyPr rtlCol="0" anchor="ctr"/>
-          <a:lstStyle/>
-          <a:p>
-            <a:pPr algn="ctr"/>
-          </a:p>
-        </p:txBody>
-      </p:sp>
-      <p:pic>
-        <p:nvPicPr>
-          <p:cNvPr id="29" name="Picture 28" descr="examlab.png"/>
-          <p:cNvPicPr>
-            <a:picLocks noChangeAspect="1"/>
-          </p:cNvPicPr>
-          <p:nvPr/>
-        </p:nvPicPr>
-        <p:blipFill>
-          <a:blip r:embed="rId6"/>
-          <a:stretch>
-            <a:fillRect/>
-          </a:stretch>
-        </p:blipFill>
-        <p:spPr>
-          <a:xfrm>
-            <a:off x="7398562" y="4311396"/>
-            <a:ext cx="1220724" cy="1220724"/>
-          </a:xfrm>
-          <a:prstGeom prst="rect">
-            <a:avLst/>
-          </a:prstGeom>
-        </p:spPr>
-      </p:pic>
-      <p:sp>
-        <p:nvSpPr>
-          <p:cNvPr id="30" name="TextBox 29"/>
-          <p:cNvSpPr txBox="1"/>
-          <p:nvPr/>
-        </p:nvSpPr>
-        <p:spPr>
-          <a:xfrm>
-            <a:off x="6269583" y="5623560"/>
-            <a:ext cx="3478682" cy="621792"/>
-          </a:xfrm>
-          <a:prstGeom prst="rect">
-            <a:avLst/>
-          </a:prstGeom>
-          <a:noFill/>
-        </p:spPr>
-        <p:txBody>
-          <a:bodyPr wrap="square" anchor="t"/>
-          <a:lstStyle/>
-          <a:p>
-            <a:pPr algn="ctr"/>
-            <a:r>
-              <a:rPr sz="1300" b="1" i="0">
-                <a:solidFill>
-                  <a:srgbClr val="095292"/>
-                </a:solidFill>
-                <a:latin typeface="Calibri"/>
-              </a:rPr>
-              <a:t>ExamLab</a:t>
-            </a:r>
-          </a:p>
-          <a:p>
-            <a:pPr algn="ctr">
-              <a:spcBef>
-                <a:spcPts val="200"/>
-              </a:spcBef>
-            </a:pPr>
-            <a:r>
-              <a:rPr sz="1000" b="0" i="0">
-                <a:solidFill>
-                  <a:srgbClr val="666666"/>
-                </a:solidFill>
-                <a:latin typeface="Calibri"/>
-              </a:rPr>
-              <a:t>Talleres + quices/parciales</a:t>
-            </a:r>
-          </a:p>
-        </p:txBody>
-      </p:sp>
-      <p:sp>
-        <p:nvSpPr>
-          <p:cNvPr id="31" name="TextBox 30"/>
+              <a:rPr sz="1400" b="0" i="0">
+                <a:solidFill>
+                  <a:srgbClr val="333333"/>
+                </a:solidFill>
+                <a:latin typeface="Calibri"/>
+              </a:rPr>
+              <a:t>Parciales NUNCA en autonoma: P1=sesión 5 (21/09), P2=sesión 9 (19/10), P3=sesión 12 (09/11). La sesión 13 (16/11) es de sustentación del PI VetCare.</a:t>
+            </a:r>
+          </a:p>
+        </p:txBody>
+      </p:sp>
+      <p:sp>
+        <p:nvSpPr>
+          <p:cNvPr id="14" name="TextBox 13"/>
           <p:cNvSpPr txBox="1"/>
           <p:nvPr/>
         </p:nvSpPr>
@@ -6161,6 +5371,1241 @@
         <p:spPr>
           <a:xfrm>
             <a:off x="0" y="0"/>
+            <a:ext cx="12191695" cy="1170432"/>
+          </a:xfrm>
+          <a:prstGeom prst="rect">
+            <a:avLst/>
+          </a:prstGeom>
+          <a:solidFill>
+            <a:srgbClr val="095292"/>
+          </a:solidFill>
+          <a:ln>
+            <a:noFill/>
+          </a:ln>
+        </p:spPr>
+        <p:style>
+          <a:lnRef idx="1">
+            <a:schemeClr val="accent1"/>
+          </a:lnRef>
+          <a:fillRef idx="3">
+            <a:schemeClr val="accent1"/>
+          </a:fillRef>
+          <a:effectRef idx="2">
+            <a:schemeClr val="accent1"/>
+          </a:effectRef>
+          <a:fontRef idx="minor">
+            <a:schemeClr val="lt1"/>
+          </a:fontRef>
+        </p:style>
+        <p:txBody>
+          <a:bodyPr rtlCol="0" anchor="ctr"/>
+          <a:lstStyle/>
+          <a:p>
+            <a:pPr algn="ctr"/>
+          </a:p>
+        </p:txBody>
+      </p:sp>
+      <p:sp>
+        <p:nvSpPr>
+          <p:cNvPr id="3" name="Rectangle 2"/>
+          <p:cNvSpPr/>
+          <p:nvPr/>
+        </p:nvSpPr>
+        <p:spPr>
+          <a:xfrm>
+            <a:off x="0" y="1170432"/>
+            <a:ext cx="12191695" cy="41148"/>
+          </a:xfrm>
+          <a:prstGeom prst="rect">
+            <a:avLst/>
+          </a:prstGeom>
+          <a:solidFill>
+            <a:srgbClr val="FFD000"/>
+          </a:solidFill>
+          <a:ln>
+            <a:noFill/>
+          </a:ln>
+        </p:spPr>
+        <p:style>
+          <a:lnRef idx="1">
+            <a:schemeClr val="accent1"/>
+          </a:lnRef>
+          <a:fillRef idx="3">
+            <a:schemeClr val="accent1"/>
+          </a:fillRef>
+          <a:effectRef idx="2">
+            <a:schemeClr val="accent1"/>
+          </a:effectRef>
+          <a:fontRef idx="minor">
+            <a:schemeClr val="lt1"/>
+          </a:fontRef>
+        </p:style>
+        <p:txBody>
+          <a:bodyPr rtlCol="0" anchor="ctr"/>
+          <a:lstStyle/>
+          <a:p>
+            <a:pPr algn="ctr"/>
+          </a:p>
+        </p:txBody>
+      </p:sp>
+      <p:sp>
+        <p:nvSpPr>
+          <p:cNvPr id="4" name="TextBox 3"/>
+          <p:cNvSpPr txBox="1"/>
+          <p:nvPr/>
+        </p:nvSpPr>
+        <p:spPr>
+          <a:xfrm>
+            <a:off x="457200" y="164592"/>
+            <a:ext cx="11277295" cy="384048"/>
+          </a:xfrm>
+          <a:prstGeom prst="rect">
+            <a:avLst/>
+          </a:prstGeom>
+          <a:noFill/>
+        </p:spPr>
+        <p:txBody>
+          <a:bodyPr wrap="square">
+            <a:spAutoFit/>
+          </a:bodyPr>
+          <a:lstStyle/>
+          <a:p>
+            <a:r>
+              <a:rPr sz="2600" b="1" i="0">
+                <a:solidFill>
+                  <a:srgbClr val="FFFFFF"/>
+                </a:solidFill>
+                <a:latin typeface="Calibri"/>
+              </a:rPr>
+              <a:t>Herramientas del curso</a:t>
+            </a:r>
+          </a:p>
+        </p:txBody>
+      </p:sp>
+      <p:sp>
+        <p:nvSpPr>
+          <p:cNvPr id="5" name="TextBox 4"/>
+          <p:cNvSpPr txBox="1"/>
+          <p:nvPr/>
+        </p:nvSpPr>
+        <p:spPr>
+          <a:xfrm>
+            <a:off x="457200" y="566928"/>
+            <a:ext cx="11277295" cy="411480"/>
+          </a:xfrm>
+          <a:prstGeom prst="rect">
+            <a:avLst/>
+          </a:prstGeom>
+          <a:noFill/>
+        </p:spPr>
+        <p:txBody>
+          <a:bodyPr wrap="square">
+            <a:spAutoFit/>
+          </a:bodyPr>
+          <a:lstStyle/>
+          <a:p>
+            <a:r>
+              <a:rPr sz="1400" b="0" i="0">
+                <a:solidFill>
+                  <a:srgbClr val="B8D8EE"/>
+                </a:solidFill>
+                <a:latin typeface="Calibri"/>
+              </a:rPr>
+              <a:t>Gratis en navegador · SQL + diagramas ER + entrega/evaluación</a:t>
+            </a:r>
+          </a:p>
+        </p:txBody>
+      </p:sp>
+      <p:sp>
+        <p:nvSpPr>
+          <p:cNvPr id="6" name="Rounded Rectangle 5"/>
+          <p:cNvSpPr/>
+          <p:nvPr/>
+        </p:nvSpPr>
+        <p:spPr>
+          <a:xfrm>
+            <a:off x="457200" y="1591056"/>
+            <a:ext cx="3624986" cy="2299716"/>
+          </a:xfrm>
+          <a:prstGeom prst="roundRect">
+            <a:avLst>
+              <a:gd name="adj" fmla="val 12000"/>
+            </a:avLst>
+          </a:prstGeom>
+          <a:solidFill>
+            <a:srgbClr val="F2F2F2"/>
+          </a:solidFill>
+          <a:ln>
+            <a:noFill/>
+          </a:ln>
+        </p:spPr>
+        <p:style>
+          <a:lnRef idx="1">
+            <a:schemeClr val="accent1"/>
+          </a:lnRef>
+          <a:fillRef idx="3">
+            <a:schemeClr val="accent1"/>
+          </a:fillRef>
+          <a:effectRef idx="2">
+            <a:schemeClr val="accent1"/>
+          </a:effectRef>
+          <a:fontRef idx="minor">
+            <a:schemeClr val="lt1"/>
+          </a:fontRef>
+        </p:style>
+        <p:txBody>
+          <a:bodyPr rtlCol="0" anchor="ctr"/>
+          <a:lstStyle/>
+          <a:p>
+            <a:pPr algn="ctr"/>
+          </a:p>
+        </p:txBody>
+      </p:sp>
+      <p:sp>
+        <p:nvSpPr>
+          <p:cNvPr id="7" name="Rectangle 6"/>
+          <p:cNvSpPr/>
+          <p:nvPr/>
+        </p:nvSpPr>
+        <p:spPr>
+          <a:xfrm>
+            <a:off x="457200" y="1591056"/>
+            <a:ext cx="3624986" cy="64008"/>
+          </a:xfrm>
+          <a:prstGeom prst="rect">
+            <a:avLst/>
+          </a:prstGeom>
+          <a:solidFill>
+            <a:srgbClr val="095292"/>
+          </a:solidFill>
+          <a:ln>
+            <a:noFill/>
+          </a:ln>
+        </p:spPr>
+        <p:style>
+          <a:lnRef idx="1">
+            <a:schemeClr val="accent1"/>
+          </a:lnRef>
+          <a:fillRef idx="3">
+            <a:schemeClr val="accent1"/>
+          </a:fillRef>
+          <a:effectRef idx="2">
+            <a:schemeClr val="accent1"/>
+          </a:effectRef>
+          <a:fontRef idx="minor">
+            <a:schemeClr val="lt1"/>
+          </a:fontRef>
+        </p:style>
+        <p:txBody>
+          <a:bodyPr rtlCol="0" anchor="ctr"/>
+          <a:lstStyle/>
+          <a:p>
+            <a:pPr algn="ctr"/>
+          </a:p>
+        </p:txBody>
+      </p:sp>
+      <p:sp>
+        <p:nvSpPr>
+          <p:cNvPr id="8" name="Rectangle 7"/>
+          <p:cNvSpPr/>
+          <p:nvPr/>
+        </p:nvSpPr>
+        <p:spPr>
+          <a:xfrm>
+            <a:off x="457200" y="1655064"/>
+            <a:ext cx="3624986" cy="27432"/>
+          </a:xfrm>
+          <a:prstGeom prst="rect">
+            <a:avLst/>
+          </a:prstGeom>
+          <a:solidFill>
+            <a:srgbClr val="FFD000"/>
+          </a:solidFill>
+          <a:ln>
+            <a:noFill/>
+          </a:ln>
+        </p:spPr>
+        <p:style>
+          <a:lnRef idx="1">
+            <a:schemeClr val="accent1"/>
+          </a:lnRef>
+          <a:fillRef idx="3">
+            <a:schemeClr val="accent1"/>
+          </a:fillRef>
+          <a:effectRef idx="2">
+            <a:schemeClr val="accent1"/>
+          </a:effectRef>
+          <a:fontRef idx="minor">
+            <a:schemeClr val="lt1"/>
+          </a:fontRef>
+        </p:style>
+        <p:txBody>
+          <a:bodyPr rtlCol="0" anchor="ctr"/>
+          <a:lstStyle/>
+          <a:p>
+            <a:pPr algn="ctr"/>
+          </a:p>
+        </p:txBody>
+      </p:sp>
+      <p:pic>
+        <p:nvPicPr>
+          <p:cNvPr id="9" name="Picture 8" descr="dbfiddle.png"/>
+          <p:cNvPicPr>
+            <a:picLocks noChangeAspect="1"/>
+          </p:cNvPicPr>
+          <p:nvPr/>
+        </p:nvPicPr>
+        <p:blipFill>
+          <a:blip r:embed="rId2"/>
+          <a:stretch>
+            <a:fillRect/>
+          </a:stretch>
+        </p:blipFill>
+        <p:spPr>
+          <a:xfrm>
+            <a:off x="1659331" y="1847087"/>
+            <a:ext cx="1220724" cy="1220724"/>
+          </a:xfrm>
+          <a:prstGeom prst="rect">
+            <a:avLst/>
+          </a:prstGeom>
+        </p:spPr>
+      </p:pic>
+      <p:sp>
+        <p:nvSpPr>
+          <p:cNvPr id="10" name="TextBox 9"/>
+          <p:cNvSpPr txBox="1"/>
+          <p:nvPr/>
+        </p:nvSpPr>
+        <p:spPr>
+          <a:xfrm>
+            <a:off x="530352" y="3159251"/>
+            <a:ext cx="3478682" cy="621792"/>
+          </a:xfrm>
+          <a:prstGeom prst="rect">
+            <a:avLst/>
+          </a:prstGeom>
+          <a:noFill/>
+        </p:spPr>
+        <p:txBody>
+          <a:bodyPr wrap="square" anchor="t"/>
+          <a:lstStyle/>
+          <a:p>
+            <a:pPr algn="ctr"/>
+            <a:r>
+              <a:rPr sz="1300" b="1" i="0">
+                <a:solidFill>
+                  <a:srgbClr val="095292"/>
+                </a:solidFill>
+                <a:latin typeface="Calibri"/>
+              </a:rPr>
+              <a:t>DB Fiddle</a:t>
+            </a:r>
+          </a:p>
+          <a:p>
+            <a:pPr algn="ctr">
+              <a:spcBef>
+                <a:spcPts val="200"/>
+              </a:spcBef>
+            </a:pPr>
+            <a:r>
+              <a:rPr sz="1000" b="0" i="0">
+                <a:solidFill>
+                  <a:srgbClr val="666666"/>
+                </a:solidFill>
+                <a:latin typeface="Calibri"/>
+              </a:rPr>
+              <a:t>SQL práctico</a:t>
+            </a:r>
+          </a:p>
+        </p:txBody>
+      </p:sp>
+      <p:sp>
+        <p:nvSpPr>
+          <p:cNvPr id="11" name="Rounded Rectangle 10"/>
+          <p:cNvSpPr/>
+          <p:nvPr/>
+        </p:nvSpPr>
+        <p:spPr>
+          <a:xfrm>
+            <a:off x="4283354" y="1591056"/>
+            <a:ext cx="3624986" cy="2299716"/>
+          </a:xfrm>
+          <a:prstGeom prst="roundRect">
+            <a:avLst>
+              <a:gd name="adj" fmla="val 12000"/>
+            </a:avLst>
+          </a:prstGeom>
+          <a:solidFill>
+            <a:srgbClr val="F2F2F2"/>
+          </a:solidFill>
+          <a:ln>
+            <a:noFill/>
+          </a:ln>
+        </p:spPr>
+        <p:style>
+          <a:lnRef idx="1">
+            <a:schemeClr val="accent1"/>
+          </a:lnRef>
+          <a:fillRef idx="3">
+            <a:schemeClr val="accent1"/>
+          </a:fillRef>
+          <a:effectRef idx="2">
+            <a:schemeClr val="accent1"/>
+          </a:effectRef>
+          <a:fontRef idx="minor">
+            <a:schemeClr val="lt1"/>
+          </a:fontRef>
+        </p:style>
+        <p:txBody>
+          <a:bodyPr rtlCol="0" anchor="ctr"/>
+          <a:lstStyle/>
+          <a:p>
+            <a:pPr algn="ctr"/>
+          </a:p>
+        </p:txBody>
+      </p:sp>
+      <p:sp>
+        <p:nvSpPr>
+          <p:cNvPr id="12" name="Rectangle 11"/>
+          <p:cNvSpPr/>
+          <p:nvPr/>
+        </p:nvSpPr>
+        <p:spPr>
+          <a:xfrm>
+            <a:off x="4283354" y="1591056"/>
+            <a:ext cx="3624986" cy="64008"/>
+          </a:xfrm>
+          <a:prstGeom prst="rect">
+            <a:avLst/>
+          </a:prstGeom>
+          <a:solidFill>
+            <a:srgbClr val="095292"/>
+          </a:solidFill>
+          <a:ln>
+            <a:noFill/>
+          </a:ln>
+        </p:spPr>
+        <p:style>
+          <a:lnRef idx="1">
+            <a:schemeClr val="accent1"/>
+          </a:lnRef>
+          <a:fillRef idx="3">
+            <a:schemeClr val="accent1"/>
+          </a:fillRef>
+          <a:effectRef idx="2">
+            <a:schemeClr val="accent1"/>
+          </a:effectRef>
+          <a:fontRef idx="minor">
+            <a:schemeClr val="lt1"/>
+          </a:fontRef>
+        </p:style>
+        <p:txBody>
+          <a:bodyPr rtlCol="0" anchor="ctr"/>
+          <a:lstStyle/>
+          <a:p>
+            <a:pPr algn="ctr"/>
+          </a:p>
+        </p:txBody>
+      </p:sp>
+      <p:sp>
+        <p:nvSpPr>
+          <p:cNvPr id="13" name="Rectangle 12"/>
+          <p:cNvSpPr/>
+          <p:nvPr/>
+        </p:nvSpPr>
+        <p:spPr>
+          <a:xfrm>
+            <a:off x="4283354" y="1655064"/>
+            <a:ext cx="3624986" cy="27432"/>
+          </a:xfrm>
+          <a:prstGeom prst="rect">
+            <a:avLst/>
+          </a:prstGeom>
+          <a:solidFill>
+            <a:srgbClr val="FFD000"/>
+          </a:solidFill>
+          <a:ln>
+            <a:noFill/>
+          </a:ln>
+        </p:spPr>
+        <p:style>
+          <a:lnRef idx="1">
+            <a:schemeClr val="accent1"/>
+          </a:lnRef>
+          <a:fillRef idx="3">
+            <a:schemeClr val="accent1"/>
+          </a:fillRef>
+          <a:effectRef idx="2">
+            <a:schemeClr val="accent1"/>
+          </a:effectRef>
+          <a:fontRef idx="minor">
+            <a:schemeClr val="lt1"/>
+          </a:fontRef>
+        </p:style>
+        <p:txBody>
+          <a:bodyPr rtlCol="0" anchor="ctr"/>
+          <a:lstStyle/>
+          <a:p>
+            <a:pPr algn="ctr"/>
+          </a:p>
+        </p:txBody>
+      </p:sp>
+      <p:pic>
+        <p:nvPicPr>
+          <p:cNvPr id="14" name="Picture 13" descr="oracle_livesql.png"/>
+          <p:cNvPicPr>
+            <a:picLocks noChangeAspect="1"/>
+          </p:cNvPicPr>
+          <p:nvPr/>
+        </p:nvPicPr>
+        <p:blipFill>
+          <a:blip r:embed="rId3"/>
+          <a:stretch>
+            <a:fillRect/>
+          </a:stretch>
+        </p:blipFill>
+        <p:spPr>
+          <a:xfrm>
+            <a:off x="5485485" y="1847087"/>
+            <a:ext cx="1220724" cy="1220724"/>
+          </a:xfrm>
+          <a:prstGeom prst="rect">
+            <a:avLst/>
+          </a:prstGeom>
+        </p:spPr>
+      </p:pic>
+      <p:sp>
+        <p:nvSpPr>
+          <p:cNvPr id="15" name="TextBox 14"/>
+          <p:cNvSpPr txBox="1"/>
+          <p:nvPr/>
+        </p:nvSpPr>
+        <p:spPr>
+          <a:xfrm>
+            <a:off x="4356506" y="3159251"/>
+            <a:ext cx="3478682" cy="621792"/>
+          </a:xfrm>
+          <a:prstGeom prst="rect">
+            <a:avLst/>
+          </a:prstGeom>
+          <a:noFill/>
+        </p:spPr>
+        <p:txBody>
+          <a:bodyPr wrap="square" anchor="t"/>
+          <a:lstStyle/>
+          <a:p>
+            <a:pPr algn="ctr"/>
+            <a:r>
+              <a:rPr sz="1300" b="1" i="0">
+                <a:solidFill>
+                  <a:srgbClr val="095292"/>
+                </a:solidFill>
+                <a:latin typeface="Calibri"/>
+              </a:rPr>
+              <a:t>Oracle Live SQL</a:t>
+            </a:r>
+          </a:p>
+          <a:p>
+            <a:pPr algn="ctr">
+              <a:spcBef>
+                <a:spcPts val="200"/>
+              </a:spcBef>
+            </a:pPr>
+            <a:r>
+              <a:rPr sz="1000" b="0" i="0">
+                <a:solidFill>
+                  <a:srgbClr val="666666"/>
+                </a:solidFill>
+                <a:latin typeface="Calibri"/>
+              </a:rPr>
+              <a:t>PL/SQL · cuenta free</a:t>
+            </a:r>
+          </a:p>
+        </p:txBody>
+      </p:sp>
+      <p:sp>
+        <p:nvSpPr>
+          <p:cNvPr id="16" name="Rounded Rectangle 15"/>
+          <p:cNvSpPr/>
+          <p:nvPr/>
+        </p:nvSpPr>
+        <p:spPr>
+          <a:xfrm>
+            <a:off x="8109508" y="1591056"/>
+            <a:ext cx="3624986" cy="2299716"/>
+          </a:xfrm>
+          <a:prstGeom prst="roundRect">
+            <a:avLst>
+              <a:gd name="adj" fmla="val 12000"/>
+            </a:avLst>
+          </a:prstGeom>
+          <a:solidFill>
+            <a:srgbClr val="F2F2F2"/>
+          </a:solidFill>
+          <a:ln>
+            <a:noFill/>
+          </a:ln>
+        </p:spPr>
+        <p:style>
+          <a:lnRef idx="1">
+            <a:schemeClr val="accent1"/>
+          </a:lnRef>
+          <a:fillRef idx="3">
+            <a:schemeClr val="accent1"/>
+          </a:fillRef>
+          <a:effectRef idx="2">
+            <a:schemeClr val="accent1"/>
+          </a:effectRef>
+          <a:fontRef idx="minor">
+            <a:schemeClr val="lt1"/>
+          </a:fontRef>
+        </p:style>
+        <p:txBody>
+          <a:bodyPr rtlCol="0" anchor="ctr"/>
+          <a:lstStyle/>
+          <a:p>
+            <a:pPr algn="ctr"/>
+          </a:p>
+        </p:txBody>
+      </p:sp>
+      <p:sp>
+        <p:nvSpPr>
+          <p:cNvPr id="17" name="Rectangle 16"/>
+          <p:cNvSpPr/>
+          <p:nvPr/>
+        </p:nvSpPr>
+        <p:spPr>
+          <a:xfrm>
+            <a:off x="8109508" y="1591056"/>
+            <a:ext cx="3624986" cy="64008"/>
+          </a:xfrm>
+          <a:prstGeom prst="rect">
+            <a:avLst/>
+          </a:prstGeom>
+          <a:solidFill>
+            <a:srgbClr val="095292"/>
+          </a:solidFill>
+          <a:ln>
+            <a:noFill/>
+          </a:ln>
+        </p:spPr>
+        <p:style>
+          <a:lnRef idx="1">
+            <a:schemeClr val="accent1"/>
+          </a:lnRef>
+          <a:fillRef idx="3">
+            <a:schemeClr val="accent1"/>
+          </a:fillRef>
+          <a:effectRef idx="2">
+            <a:schemeClr val="accent1"/>
+          </a:effectRef>
+          <a:fontRef idx="minor">
+            <a:schemeClr val="lt1"/>
+          </a:fontRef>
+        </p:style>
+        <p:txBody>
+          <a:bodyPr rtlCol="0" anchor="ctr"/>
+          <a:lstStyle/>
+          <a:p>
+            <a:pPr algn="ctr"/>
+          </a:p>
+        </p:txBody>
+      </p:sp>
+      <p:sp>
+        <p:nvSpPr>
+          <p:cNvPr id="18" name="Rectangle 17"/>
+          <p:cNvSpPr/>
+          <p:nvPr/>
+        </p:nvSpPr>
+        <p:spPr>
+          <a:xfrm>
+            <a:off x="8109508" y="1655064"/>
+            <a:ext cx="3624986" cy="27432"/>
+          </a:xfrm>
+          <a:prstGeom prst="rect">
+            <a:avLst/>
+          </a:prstGeom>
+          <a:solidFill>
+            <a:srgbClr val="FFD000"/>
+          </a:solidFill>
+          <a:ln>
+            <a:noFill/>
+          </a:ln>
+        </p:spPr>
+        <p:style>
+          <a:lnRef idx="1">
+            <a:schemeClr val="accent1"/>
+          </a:lnRef>
+          <a:fillRef idx="3">
+            <a:schemeClr val="accent1"/>
+          </a:fillRef>
+          <a:effectRef idx="2">
+            <a:schemeClr val="accent1"/>
+          </a:effectRef>
+          <a:fontRef idx="minor">
+            <a:schemeClr val="lt1"/>
+          </a:fontRef>
+        </p:style>
+        <p:txBody>
+          <a:bodyPr rtlCol="0" anchor="ctr"/>
+          <a:lstStyle/>
+          <a:p>
+            <a:pPr algn="ctr"/>
+          </a:p>
+        </p:txBody>
+      </p:sp>
+      <p:pic>
+        <p:nvPicPr>
+          <p:cNvPr id="19" name="Picture 18" descr="drawio.png"/>
+          <p:cNvPicPr>
+            <a:picLocks noChangeAspect="1"/>
+          </p:cNvPicPr>
+          <p:nvPr/>
+        </p:nvPicPr>
+        <p:blipFill>
+          <a:blip r:embed="rId4"/>
+          <a:stretch>
+            <a:fillRect/>
+          </a:stretch>
+        </p:blipFill>
+        <p:spPr>
+          <a:xfrm>
+            <a:off x="9311640" y="1847087"/>
+            <a:ext cx="1220724" cy="1220724"/>
+          </a:xfrm>
+          <a:prstGeom prst="rect">
+            <a:avLst/>
+          </a:prstGeom>
+        </p:spPr>
+      </p:pic>
+      <p:sp>
+        <p:nvSpPr>
+          <p:cNvPr id="20" name="TextBox 19"/>
+          <p:cNvSpPr txBox="1"/>
+          <p:nvPr/>
+        </p:nvSpPr>
+        <p:spPr>
+          <a:xfrm>
+            <a:off x="8182660" y="3159251"/>
+            <a:ext cx="3478682" cy="621792"/>
+          </a:xfrm>
+          <a:prstGeom prst="rect">
+            <a:avLst/>
+          </a:prstGeom>
+          <a:noFill/>
+        </p:spPr>
+        <p:txBody>
+          <a:bodyPr wrap="square" anchor="t"/>
+          <a:lstStyle/>
+          <a:p>
+            <a:pPr algn="ctr"/>
+            <a:r>
+              <a:rPr sz="1300" b="1" i="0">
+                <a:solidFill>
+                  <a:srgbClr val="095292"/>
+                </a:solidFill>
+                <a:latin typeface="Calibri"/>
+              </a:rPr>
+              <a:t>draw.io</a:t>
+            </a:r>
+          </a:p>
+          <a:p>
+            <a:pPr algn="ctr">
+              <a:spcBef>
+                <a:spcPts val="200"/>
+              </a:spcBef>
+            </a:pPr>
+            <a:r>
+              <a:rPr sz="1000" b="0" i="0">
+                <a:solidFill>
+                  <a:srgbClr val="666666"/>
+                </a:solidFill>
+                <a:latin typeface="Calibri"/>
+              </a:rPr>
+              <a:t>Modelos ER</a:t>
+            </a:r>
+          </a:p>
+        </p:txBody>
+      </p:sp>
+      <p:sp>
+        <p:nvSpPr>
+          <p:cNvPr id="21" name="Rounded Rectangle 20"/>
+          <p:cNvSpPr/>
+          <p:nvPr/>
+        </p:nvSpPr>
+        <p:spPr>
+          <a:xfrm>
+            <a:off x="2370277" y="4055364"/>
+            <a:ext cx="3624986" cy="2299716"/>
+          </a:xfrm>
+          <a:prstGeom prst="roundRect">
+            <a:avLst>
+              <a:gd name="adj" fmla="val 12000"/>
+            </a:avLst>
+          </a:prstGeom>
+          <a:solidFill>
+            <a:srgbClr val="F2F2F2"/>
+          </a:solidFill>
+          <a:ln>
+            <a:noFill/>
+          </a:ln>
+        </p:spPr>
+        <p:style>
+          <a:lnRef idx="1">
+            <a:schemeClr val="accent1"/>
+          </a:lnRef>
+          <a:fillRef idx="3">
+            <a:schemeClr val="accent1"/>
+          </a:fillRef>
+          <a:effectRef idx="2">
+            <a:schemeClr val="accent1"/>
+          </a:effectRef>
+          <a:fontRef idx="minor">
+            <a:schemeClr val="lt1"/>
+          </a:fontRef>
+        </p:style>
+        <p:txBody>
+          <a:bodyPr rtlCol="0" anchor="ctr"/>
+          <a:lstStyle/>
+          <a:p>
+            <a:pPr algn="ctr"/>
+          </a:p>
+        </p:txBody>
+      </p:sp>
+      <p:sp>
+        <p:nvSpPr>
+          <p:cNvPr id="22" name="Rectangle 21"/>
+          <p:cNvSpPr/>
+          <p:nvPr/>
+        </p:nvSpPr>
+        <p:spPr>
+          <a:xfrm>
+            <a:off x="2370277" y="4055364"/>
+            <a:ext cx="3624986" cy="64008"/>
+          </a:xfrm>
+          <a:prstGeom prst="rect">
+            <a:avLst/>
+          </a:prstGeom>
+          <a:solidFill>
+            <a:srgbClr val="095292"/>
+          </a:solidFill>
+          <a:ln>
+            <a:noFill/>
+          </a:ln>
+        </p:spPr>
+        <p:style>
+          <a:lnRef idx="1">
+            <a:schemeClr val="accent1"/>
+          </a:lnRef>
+          <a:fillRef idx="3">
+            <a:schemeClr val="accent1"/>
+          </a:fillRef>
+          <a:effectRef idx="2">
+            <a:schemeClr val="accent1"/>
+          </a:effectRef>
+          <a:fontRef idx="minor">
+            <a:schemeClr val="lt1"/>
+          </a:fontRef>
+        </p:style>
+        <p:txBody>
+          <a:bodyPr rtlCol="0" anchor="ctr"/>
+          <a:lstStyle/>
+          <a:p>
+            <a:pPr algn="ctr"/>
+          </a:p>
+        </p:txBody>
+      </p:sp>
+      <p:sp>
+        <p:nvSpPr>
+          <p:cNvPr id="23" name="Rectangle 22"/>
+          <p:cNvSpPr/>
+          <p:nvPr/>
+        </p:nvSpPr>
+        <p:spPr>
+          <a:xfrm>
+            <a:off x="2370277" y="4119372"/>
+            <a:ext cx="3624986" cy="27432"/>
+          </a:xfrm>
+          <a:prstGeom prst="rect">
+            <a:avLst/>
+          </a:prstGeom>
+          <a:solidFill>
+            <a:srgbClr val="FFD000"/>
+          </a:solidFill>
+          <a:ln>
+            <a:noFill/>
+          </a:ln>
+        </p:spPr>
+        <p:style>
+          <a:lnRef idx="1">
+            <a:schemeClr val="accent1"/>
+          </a:lnRef>
+          <a:fillRef idx="3">
+            <a:schemeClr val="accent1"/>
+          </a:fillRef>
+          <a:effectRef idx="2">
+            <a:schemeClr val="accent1"/>
+          </a:effectRef>
+          <a:fontRef idx="minor">
+            <a:schemeClr val="lt1"/>
+          </a:fontRef>
+        </p:style>
+        <p:txBody>
+          <a:bodyPr rtlCol="0" anchor="ctr"/>
+          <a:lstStyle/>
+          <a:p>
+            <a:pPr algn="ctr"/>
+          </a:p>
+        </p:txBody>
+      </p:sp>
+      <p:pic>
+        <p:nvPicPr>
+          <p:cNvPr id="24" name="Picture 23" descr="sqltest.png"/>
+          <p:cNvPicPr>
+            <a:picLocks noChangeAspect="1"/>
+          </p:cNvPicPr>
+          <p:nvPr/>
+        </p:nvPicPr>
+        <p:blipFill>
+          <a:blip r:embed="rId5"/>
+          <a:stretch>
+            <a:fillRect/>
+          </a:stretch>
+        </p:blipFill>
+        <p:spPr>
+          <a:xfrm>
+            <a:off x="3572408" y="4311396"/>
+            <a:ext cx="1220724" cy="1220724"/>
+          </a:xfrm>
+          <a:prstGeom prst="rect">
+            <a:avLst/>
+          </a:prstGeom>
+        </p:spPr>
+      </p:pic>
+      <p:sp>
+        <p:nvSpPr>
+          <p:cNvPr id="25" name="TextBox 24"/>
+          <p:cNvSpPr txBox="1"/>
+          <p:nvPr/>
+        </p:nvSpPr>
+        <p:spPr>
+          <a:xfrm>
+            <a:off x="2443429" y="5623560"/>
+            <a:ext cx="3478682" cy="621792"/>
+          </a:xfrm>
+          <a:prstGeom prst="rect">
+            <a:avLst/>
+          </a:prstGeom>
+          <a:noFill/>
+        </p:spPr>
+        <p:txBody>
+          <a:bodyPr wrap="square" anchor="t"/>
+          <a:lstStyle/>
+          <a:p>
+            <a:pPr algn="ctr"/>
+            <a:r>
+              <a:rPr sz="1300" b="1" i="0">
+                <a:solidFill>
+                  <a:srgbClr val="095292"/>
+                </a:solidFill>
+                <a:latin typeface="Calibri"/>
+              </a:rPr>
+              <a:t>SQLTest.online</a:t>
+            </a:r>
+          </a:p>
+          <a:p>
+            <a:pPr algn="ctr">
+              <a:spcBef>
+                <a:spcPts val="200"/>
+              </a:spcBef>
+            </a:pPr>
+            <a:r>
+              <a:rPr sz="1000" b="0" i="0">
+                <a:solidFill>
+                  <a:srgbClr val="666666"/>
+                </a:solidFill>
+                <a:latin typeface="Calibri"/>
+              </a:rPr>
+              <a:t>Multi-motor</a:t>
+            </a:r>
+          </a:p>
+        </p:txBody>
+      </p:sp>
+      <p:sp>
+        <p:nvSpPr>
+          <p:cNvPr id="26" name="Rounded Rectangle 25"/>
+          <p:cNvSpPr/>
+          <p:nvPr/>
+        </p:nvSpPr>
+        <p:spPr>
+          <a:xfrm>
+            <a:off x="6196431" y="4055364"/>
+            <a:ext cx="3624986" cy="2299716"/>
+          </a:xfrm>
+          <a:prstGeom prst="roundRect">
+            <a:avLst>
+              <a:gd name="adj" fmla="val 12000"/>
+            </a:avLst>
+          </a:prstGeom>
+          <a:solidFill>
+            <a:srgbClr val="F2F2F2"/>
+          </a:solidFill>
+          <a:ln>
+            <a:noFill/>
+          </a:ln>
+        </p:spPr>
+        <p:style>
+          <a:lnRef idx="1">
+            <a:schemeClr val="accent1"/>
+          </a:lnRef>
+          <a:fillRef idx="3">
+            <a:schemeClr val="accent1"/>
+          </a:fillRef>
+          <a:effectRef idx="2">
+            <a:schemeClr val="accent1"/>
+          </a:effectRef>
+          <a:fontRef idx="minor">
+            <a:schemeClr val="lt1"/>
+          </a:fontRef>
+        </p:style>
+        <p:txBody>
+          <a:bodyPr rtlCol="0" anchor="ctr"/>
+          <a:lstStyle/>
+          <a:p>
+            <a:pPr algn="ctr"/>
+          </a:p>
+        </p:txBody>
+      </p:sp>
+      <p:sp>
+        <p:nvSpPr>
+          <p:cNvPr id="27" name="Rectangle 26"/>
+          <p:cNvSpPr/>
+          <p:nvPr/>
+        </p:nvSpPr>
+        <p:spPr>
+          <a:xfrm>
+            <a:off x="6196431" y="4055364"/>
+            <a:ext cx="3624986" cy="64008"/>
+          </a:xfrm>
+          <a:prstGeom prst="rect">
+            <a:avLst/>
+          </a:prstGeom>
+          <a:solidFill>
+            <a:srgbClr val="095292"/>
+          </a:solidFill>
+          <a:ln>
+            <a:noFill/>
+          </a:ln>
+        </p:spPr>
+        <p:style>
+          <a:lnRef idx="1">
+            <a:schemeClr val="accent1"/>
+          </a:lnRef>
+          <a:fillRef idx="3">
+            <a:schemeClr val="accent1"/>
+          </a:fillRef>
+          <a:effectRef idx="2">
+            <a:schemeClr val="accent1"/>
+          </a:effectRef>
+          <a:fontRef idx="minor">
+            <a:schemeClr val="lt1"/>
+          </a:fontRef>
+        </p:style>
+        <p:txBody>
+          <a:bodyPr rtlCol="0" anchor="ctr"/>
+          <a:lstStyle/>
+          <a:p>
+            <a:pPr algn="ctr"/>
+          </a:p>
+        </p:txBody>
+      </p:sp>
+      <p:sp>
+        <p:nvSpPr>
+          <p:cNvPr id="28" name="Rectangle 27"/>
+          <p:cNvSpPr/>
+          <p:nvPr/>
+        </p:nvSpPr>
+        <p:spPr>
+          <a:xfrm>
+            <a:off x="6196431" y="4119372"/>
+            <a:ext cx="3624986" cy="27432"/>
+          </a:xfrm>
+          <a:prstGeom prst="rect">
+            <a:avLst/>
+          </a:prstGeom>
+          <a:solidFill>
+            <a:srgbClr val="FFD000"/>
+          </a:solidFill>
+          <a:ln>
+            <a:noFill/>
+          </a:ln>
+        </p:spPr>
+        <p:style>
+          <a:lnRef idx="1">
+            <a:schemeClr val="accent1"/>
+          </a:lnRef>
+          <a:fillRef idx="3">
+            <a:schemeClr val="accent1"/>
+          </a:fillRef>
+          <a:effectRef idx="2">
+            <a:schemeClr val="accent1"/>
+          </a:effectRef>
+          <a:fontRef idx="minor">
+            <a:schemeClr val="lt1"/>
+          </a:fontRef>
+        </p:style>
+        <p:txBody>
+          <a:bodyPr rtlCol="0" anchor="ctr"/>
+          <a:lstStyle/>
+          <a:p>
+            <a:pPr algn="ctr"/>
+          </a:p>
+        </p:txBody>
+      </p:sp>
+      <p:pic>
+        <p:nvPicPr>
+          <p:cNvPr id="29" name="Picture 28" descr="examlab.png"/>
+          <p:cNvPicPr>
+            <a:picLocks noChangeAspect="1"/>
+          </p:cNvPicPr>
+          <p:nvPr/>
+        </p:nvPicPr>
+        <p:blipFill>
+          <a:blip r:embed="rId6"/>
+          <a:stretch>
+            <a:fillRect/>
+          </a:stretch>
+        </p:blipFill>
+        <p:spPr>
+          <a:xfrm>
+            <a:off x="7398562" y="4311396"/>
+            <a:ext cx="1220724" cy="1220724"/>
+          </a:xfrm>
+          <a:prstGeom prst="rect">
+            <a:avLst/>
+          </a:prstGeom>
+        </p:spPr>
+      </p:pic>
+      <p:sp>
+        <p:nvSpPr>
+          <p:cNvPr id="30" name="TextBox 29"/>
+          <p:cNvSpPr txBox="1"/>
+          <p:nvPr/>
+        </p:nvSpPr>
+        <p:spPr>
+          <a:xfrm>
+            <a:off x="6269583" y="5623560"/>
+            <a:ext cx="3478682" cy="621792"/>
+          </a:xfrm>
+          <a:prstGeom prst="rect">
+            <a:avLst/>
+          </a:prstGeom>
+          <a:noFill/>
+        </p:spPr>
+        <p:txBody>
+          <a:bodyPr wrap="square" anchor="t"/>
+          <a:lstStyle/>
+          <a:p>
+            <a:pPr algn="ctr"/>
+            <a:r>
+              <a:rPr sz="1300" b="1" i="0">
+                <a:solidFill>
+                  <a:srgbClr val="095292"/>
+                </a:solidFill>
+                <a:latin typeface="Calibri"/>
+              </a:rPr>
+              <a:t>ExamLab</a:t>
+            </a:r>
+          </a:p>
+          <a:p>
+            <a:pPr algn="ctr">
+              <a:spcBef>
+                <a:spcPts val="200"/>
+              </a:spcBef>
+            </a:pPr>
+            <a:r>
+              <a:rPr sz="1000" b="0" i="0">
+                <a:solidFill>
+                  <a:srgbClr val="666666"/>
+                </a:solidFill>
+                <a:latin typeface="Calibri"/>
+              </a:rPr>
+              <a:t>Talleres + quices/parciales</a:t>
+            </a:r>
+          </a:p>
+        </p:txBody>
+      </p:sp>
+      <p:sp>
+        <p:nvSpPr>
+          <p:cNvPr id="31" name="TextBox 30"/>
+          <p:cNvSpPr txBox="1"/>
+          <p:nvPr/>
+        </p:nvSpPr>
+        <p:spPr>
+          <a:xfrm>
+            <a:off x="11185855" y="6473952"/>
+            <a:ext cx="640080" cy="274320"/>
+          </a:xfrm>
+          <a:prstGeom prst="rect">
+            <a:avLst/>
+          </a:prstGeom>
+          <a:noFill/>
+        </p:spPr>
+        <p:txBody>
+          <a:bodyPr wrap="square">
+            <a:spAutoFit/>
+          </a:bodyPr>
+          <a:lstStyle/>
+          <a:p>
+            <a:pPr algn="r"/>
+            <a:r>
+              <a:rPr sz="1100" b="0" i="0">
+                <a:solidFill>
+                  <a:srgbClr val="666666"/>
+                </a:solidFill>
+                <a:latin typeface="Calibri"/>
+              </a:rPr>
+              <a:t>13</a:t>
+            </a:r>
+          </a:p>
+        </p:txBody>
+      </p:sp>
+    </p:spTree>
+  </p:cSld>
+  <p:clrMapOvr>
+    <a:masterClrMapping/>
+  </p:clrMapOvr>
+</p:sld>
+</file>
+
+<file path=ppt/slides/slide15.xml><?xml version="1.0" encoding="utf-8"?>
+<p:sld xmlns:a="http://schemas.openxmlformats.org/drawingml/2006/main" xmlns:p="http://schemas.openxmlformats.org/presentationml/2006/main" xmlns:r="http://schemas.openxmlformats.org/officeDocument/2006/relationships">
+  <p:cSld>
+    <p:bg>
+      <p:bgPr>
+        <a:solidFill>
+          <a:srgbClr val="FFFFFF"/>
+        </a:solidFill>
+        <a:effectLst/>
+      </p:bgPr>
+    </p:bg>
+    <p:spTree>
+      <p:nvGrpSpPr>
+        <p:cNvPr id="1" name=""/>
+        <p:cNvGrpSpPr/>
+        <p:nvPr/>
+      </p:nvGrpSpPr>
+      <p:grpSpPr/>
+      <p:sp>
+        <p:nvSpPr>
+          <p:cNvPr id="2" name="Rectangle 1"/>
+          <p:cNvSpPr/>
+          <p:nvPr/>
+        </p:nvSpPr>
+        <p:spPr>
+          <a:xfrm>
+            <a:off x="0" y="0"/>
             <a:ext cx="12191695" cy="164592"/>
           </a:xfrm>
           <a:prstGeom prst="rect">
@@ -8610,7 +9055,7 @@
                 </a:solidFill>
                 <a:latin typeface="Calibri"/>
               </a:rPr>
-              <a:t>: sesión 1 y parciales (</a:t>
+              <a:t>, todas </a:t>
             </a:r>
             <a:r>
               <a:rPr sz="1600" b="1" i="0">
@@ -8619,6 +9064,24 @@
                 </a:solidFill>
                 <a:latin typeface="Calibri"/>
               </a:rPr>
+              <a:t>virtuales síncronas por Meet</a:t>
+            </a:r>
+            <a:r>
+              <a:rPr sz="1600" b="0" i="0">
+                <a:solidFill>
+                  <a:srgbClr val="333333"/>
+                </a:solidFill>
+                <a:latin typeface="Calibri"/>
+              </a:rPr>
+              <a:t> — incluidos los parciales (</a:t>
+            </a:r>
+            <a:r>
+              <a:rPr sz="1600" b="1" i="0">
+                <a:solidFill>
+                  <a:srgbClr val="333333"/>
+                </a:solidFill>
+                <a:latin typeface="Calibri"/>
+              </a:rPr>
               <a:t>5 / 9 / 12</a:t>
             </a:r>
             <a:r>
@@ -8628,43 +9091,7 @@
                 </a:solidFill>
                 <a:latin typeface="Calibri"/>
               </a:rPr>
-              <a:t>) </a:t>
-            </a:r>
-            <a:r>
-              <a:rPr sz="1600" b="1" i="0">
-                <a:solidFill>
-                  <a:srgbClr val="333333"/>
-                </a:solidFill>
-                <a:latin typeface="Calibri"/>
-              </a:rPr>
-              <a:t>presencial</a:t>
-            </a:r>
-            <a:r>
-              <a:rPr sz="1600" b="0" i="0">
-                <a:solidFill>
-                  <a:srgbClr val="333333"/>
-                </a:solidFill>
-                <a:latin typeface="Calibri"/>
-              </a:rPr>
-              <a:t>; resto </a:t>
-            </a:r>
-            <a:r>
-              <a:rPr sz="1600" b="1" i="0">
-                <a:solidFill>
-                  <a:srgbClr val="333333"/>
-                </a:solidFill>
-                <a:latin typeface="Calibri"/>
-              </a:rPr>
-              <a:t>virtual síncrona</a:t>
-            </a:r>
-            <a:r>
-              <a:rPr sz="1600" b="0" i="0">
-                <a:solidFill>
-                  <a:srgbClr val="333333"/>
-                </a:solidFill>
-                <a:latin typeface="Calibri"/>
-              </a:rPr>
-              <a:t>; festivos = </a:t>
+              <a:t>); festivos = </a:t>
             </a:r>
             <a:r>
               <a:rPr sz="1600" b="1" i="0">
@@ -9877,7 +10304,7 @@
                 </a:solidFill>
                 <a:latin typeface="Calibri"/>
               </a:rPr>
-              <a:t>Parciales síncronos presenciales · nunca en festivo/autónoma. Día de parcial = solo evaluación.</a:t>
+              <a:t>Parciales síncronos por Meet · nunca en festivo/autónoma. Día de parcial = solo evaluación.</a:t>
             </a:r>
           </a:p>
         </p:txBody>
@@ -10336,7 +10763,7 @@
                 </a:solidFill>
                 <a:latin typeface="Calibri"/>
               </a:rPr>
-              <a:t> Parcial 1 (21/09) · presencial · solo evaluación</a:t>
+              <a:t> Parcial 1 (21/09) · virtual síncrona · solo evaluación</a:t>
             </a:r>
           </a:p>
           <a:p>
@@ -10495,7 +10922,7 @@
                 </a:solidFill>
                 <a:latin typeface="Calibri"/>
               </a:rPr>
-              <a:t> Parcial 2 (19/10) · presencial · solo evaluación</a:t>
+              <a:t> Parcial 2 (19/10) · virtual síncrona · solo evaluación</a:t>
             </a:r>
           </a:p>
           <a:p>
@@ -10597,7 +11024,7 @@
                 </a:solidFill>
                 <a:latin typeface="Calibri"/>
               </a:rPr>
-              <a:t> Parcial 3 (09/11) · presencial · solo evaluación</a:t>
+              <a:t> Parcial 3 (09/11) · virtual síncrona · solo evaluación</a:t>
             </a:r>
           </a:p>
           <a:p>

--- a/Bases de Datos II/Clases/Presentacion del Curso - Bases de Datos II.pptx
+++ b/Bases de Datos II/Clases/Presentacion del Curso - Bases de Datos II.pptx
@@ -3865,7 +3865,7 @@
                 </a:solidFill>
                 <a:latin typeface="Calibri"/>
               </a:rPr>
-              <a:t> del Corte 3. Enunciado: carpeta `Clases/Proyecto Integrador/`.</a:t>
+              <a:t> del Corte 3. Enunciado: carpeta «Clases/Proyecto Integrador/».</a:t>
             </a:r>
           </a:p>
         </p:txBody>

--- a/Bases de Datos II/Clases/Presentacion del Curso - Bases de Datos II.pptx
+++ b/Bases de Datos II/Clases/Presentacion del Curso - Bases de Datos II.pptx
@@ -3687,7 +3687,7 @@
               </a:spcAft>
             </a:pPr>
             <a:r>
-              <a:rPr sz="1600" b="0" i="0">
+              <a:rPr sz="2000" b="0" i="0">
                 <a:solidFill>
                   <a:srgbClr val="333333"/>
                 </a:solidFill>
@@ -3696,7 +3696,7 @@
               <a:t>–   </a:t>
             </a:r>
             <a:r>
-              <a:rPr sz="1600" b="1" i="0">
+              <a:rPr sz="2000" b="1" i="0">
                 <a:solidFill>
                   <a:srgbClr val="333333"/>
                 </a:solidFill>
@@ -3705,7 +3705,7 @@
               <a:t>Socialización de hoy (Sesión 0):</a:t>
             </a:r>
             <a:r>
-              <a:rPr sz="1600" b="0" i="0">
+              <a:rPr sz="2000" b="0" i="0">
                 <a:solidFill>
                   <a:srgbClr val="333333"/>
                 </a:solidFill>
@@ -3721,7 +3721,7 @@
               </a:spcAft>
             </a:pPr>
             <a:r>
-              <a:rPr sz="1600" b="0" i="0">
+              <a:rPr sz="2000" b="0" i="0">
                 <a:solidFill>
                   <a:srgbClr val="333333"/>
                 </a:solidFill>
@@ -3730,7 +3730,7 @@
               <a:t>–   </a:t>
             </a:r>
             <a:r>
-              <a:rPr sz="1600" b="1" i="0">
+              <a:rPr sz="2000" b="1" i="0">
                 <a:solidFill>
                   <a:srgbClr val="333333"/>
                 </a:solidFill>
@@ -3739,7 +3739,7 @@
               <a:t>VetCare DB</a:t>
             </a:r>
             <a:r>
-              <a:rPr sz="1600" b="0" i="0">
+              <a:rPr sz="2000" b="0" i="0">
                 <a:solidFill>
                   <a:srgbClr val="333333"/>
                 </a:solidFill>
@@ -3755,7 +3755,7 @@
               </a:spcAft>
             </a:pPr>
             <a:r>
-              <a:rPr sz="1600" b="0" i="0">
+              <a:rPr sz="2000" b="0" i="0">
                 <a:solidFill>
                   <a:srgbClr val="333333"/>
                 </a:solidFill>
@@ -3771,7 +3771,7 @@
               </a:spcAft>
             </a:pPr>
             <a:r>
-              <a:rPr sz="1600" b="0" i="0">
+              <a:rPr sz="2000" b="0" i="0">
                 <a:solidFill>
                   <a:srgbClr val="333333"/>
                 </a:solidFill>
@@ -3780,7 +3780,7 @@
               <a:t>–   Hitos: avance + preparación final en la </a:t>
             </a:r>
             <a:r>
-              <a:rPr sz="1600" b="1" i="0">
+              <a:rPr sz="2000" b="1" i="0">
                 <a:solidFill>
                   <a:srgbClr val="333333"/>
                 </a:solidFill>
@@ -3789,7 +3789,7 @@
               <a:t>sesión 10</a:t>
             </a:r>
             <a:r>
-              <a:rPr sz="1600" b="0" i="0">
+              <a:rPr sz="2000" b="0" i="0">
                 <a:solidFill>
                   <a:srgbClr val="333333"/>
                 </a:solidFill>
@@ -3798,7 +3798,7 @@
               <a:t> (26/10, sesión doble Clases 11+12) · </a:t>
             </a:r>
             <a:r>
-              <a:rPr sz="1600" b="1" i="0">
+              <a:rPr sz="2000" b="1" i="0">
                 <a:solidFill>
                   <a:srgbClr val="333333"/>
                 </a:solidFill>
@@ -3807,7 +3807,7 @@
               <a:t>Parcial 3</a:t>
             </a:r>
             <a:r>
-              <a:rPr sz="1600" b="0" i="0">
+              <a:rPr sz="2000" b="0" i="0">
                 <a:solidFill>
                   <a:srgbClr val="333333"/>
                 </a:solidFill>
@@ -3816,7 +3816,7 @@
               <a:t> sesión 12 (09/11) · </a:t>
             </a:r>
             <a:r>
-              <a:rPr sz="1600" b="1" i="0">
+              <a:rPr sz="2000" b="1" i="0">
                 <a:solidFill>
                   <a:srgbClr val="333333"/>
                 </a:solidFill>
@@ -3825,7 +3825,7 @@
               <a:t>sustentación</a:t>
             </a:r>
             <a:r>
-              <a:rPr sz="1600" b="0" i="0">
+              <a:rPr sz="2000" b="0" i="0">
                 <a:solidFill>
                   <a:srgbClr val="333333"/>
                 </a:solidFill>
@@ -3841,7 +3841,7 @@
               </a:spcAft>
             </a:pPr>
             <a:r>
-              <a:rPr sz="1600" b="0" i="0">
+              <a:rPr sz="2000" b="0" i="0">
                 <a:solidFill>
                   <a:srgbClr val="333333"/>
                 </a:solidFill>
@@ -3850,7 +3850,7 @@
               <a:t>–   Pesa </a:t>
             </a:r>
             <a:r>
-              <a:rPr sz="1600" b="1" i="0">
+              <a:rPr sz="2000" b="1" i="0">
                 <a:solidFill>
                   <a:srgbClr val="333333"/>
                 </a:solidFill>
@@ -3859,7 +3859,7 @@
               <a:t>20%</a:t>
             </a:r>
             <a:r>
-              <a:rPr sz="1600" b="0" i="0">
+              <a:rPr sz="2000" b="0" i="0">
                 <a:solidFill>
                   <a:srgbClr val="333333"/>
                 </a:solidFill>
@@ -4113,7 +4113,7 @@
               </a:spcAft>
             </a:pPr>
             <a:r>
-              <a:rPr sz="1600" b="0" i="0">
+              <a:rPr sz="2000" b="0" i="0">
                 <a:solidFill>
                   <a:srgbClr val="333333"/>
                 </a:solidFill>
@@ -4122,7 +4122,7 @@
               <a:t>–   Atiende un </a:t>
             </a:r>
             <a:r>
-              <a:rPr sz="1600" b="1" i="0">
+              <a:rPr sz="2000" b="1" i="0">
                 <a:solidFill>
                   <a:srgbClr val="333333"/>
                 </a:solidFill>
@@ -4131,7 +4131,7 @@
               <a:t>alto volumen de pacientes</a:t>
             </a:r>
             <a:r>
-              <a:rPr sz="1600" b="0" i="0">
+              <a:rPr sz="2000" b="0" i="0">
                 <a:solidFill>
                   <a:srgbClr val="333333"/>
                 </a:solidFill>
@@ -4140,7 +4140,7 @@
               <a:t> y hoy lleva toda su gestión en </a:t>
             </a:r>
             <a:r>
-              <a:rPr sz="1600" b="1" i="0">
+              <a:rPr sz="2000" b="1" i="0">
                 <a:solidFill>
                   <a:srgbClr val="333333"/>
                 </a:solidFill>
@@ -4149,7 +4149,7 @@
               <a:t>carpetas de papel</a:t>
             </a:r>
             <a:r>
-              <a:rPr sz="1600" b="0" i="0">
+              <a:rPr sz="2000" b="0" i="0">
                 <a:solidFill>
                   <a:srgbClr val="333333"/>
                 </a:solidFill>
@@ -4165,7 +4165,7 @@
               </a:spcAft>
             </a:pPr>
             <a:r>
-              <a:rPr sz="1600" b="0" i="0">
+              <a:rPr sz="2000" b="0" i="0">
                 <a:solidFill>
                   <a:srgbClr val="333333"/>
                 </a:solidFill>
@@ -4174,7 +4174,7 @@
               <a:t>–   Se </a:t>
             </a:r>
             <a:r>
-              <a:rPr sz="1600" b="1" i="0">
+              <a:rPr sz="2000" b="1" i="0">
                 <a:solidFill>
                   <a:srgbClr val="333333"/>
                 </a:solidFill>
@@ -4183,7 +4183,7 @@
               <a:t>extravían fichas</a:t>
             </a:r>
             <a:r>
-              <a:rPr sz="1600" b="0" i="0">
+              <a:rPr sz="2000" b="0" i="0">
                 <a:solidFill>
                   <a:srgbClr val="333333"/>
                 </a:solidFill>
@@ -4199,7 +4199,7 @@
               </a:spcAft>
             </a:pPr>
             <a:r>
-              <a:rPr sz="1600" b="0" i="0">
+              <a:rPr sz="2000" b="0" i="0">
                 <a:solidFill>
                   <a:srgbClr val="333333"/>
                 </a:solidFill>
@@ -4208,7 +4208,7 @@
               <a:t>–   Buscar un historial en el archivo físico </a:t>
             </a:r>
             <a:r>
-              <a:rPr sz="1600" b="1" i="0">
+              <a:rPr sz="2000" b="1" i="0">
                 <a:solidFill>
                   <a:srgbClr val="333333"/>
                 </a:solidFill>
@@ -4217,7 +4217,7 @@
               <a:t>genera filas</a:t>
             </a:r>
             <a:r>
-              <a:rPr sz="1600" b="0" i="0">
+              <a:rPr sz="2000" b="0" i="0">
                 <a:solidFill>
                   <a:srgbClr val="333333"/>
                 </a:solidFill>
@@ -4233,7 +4233,7 @@
               </a:spcAft>
             </a:pPr>
             <a:r>
-              <a:rPr sz="1600" b="0" i="0">
+              <a:rPr sz="2000" b="0" i="0">
                 <a:solidFill>
                   <a:srgbClr val="333333"/>
                 </a:solidFill>
@@ -4242,7 +4242,7 @@
               <a:t>–   </a:t>
             </a:r>
             <a:r>
-              <a:rPr sz="1600" b="1" i="0">
+              <a:rPr sz="2000" b="1" i="0">
                 <a:solidFill>
                   <a:srgbClr val="333333"/>
                 </a:solidFill>
@@ -4251,7 +4251,7 @@
               <a:t>No hay métricas</a:t>
             </a:r>
             <a:r>
-              <a:rPr sz="1600" b="0" i="0">
+              <a:rPr sz="2000" b="0" i="0">
                 <a:solidFill>
                   <a:srgbClr val="333333"/>
                 </a:solidFill>
@@ -4267,7 +4267,7 @@
               </a:spcAft>
             </a:pPr>
             <a:r>
-              <a:rPr sz="1600" b="0" i="0">
+              <a:rPr sz="2000" b="0" i="0">
                 <a:solidFill>
                   <a:srgbClr val="333333"/>
                 </a:solidFill>
@@ -4276,7 +4276,7 @@
               <a:t>–   </a:t>
             </a:r>
             <a:r>
-              <a:rPr sz="1600" b="1" i="0">
+              <a:rPr sz="2000" b="1" i="0">
                 <a:solidFill>
                   <a:srgbClr val="333333"/>
                 </a:solidFill>
@@ -4285,7 +4285,7 @@
               <a:t>Su parte en este curso:</a:t>
             </a:r>
             <a:r>
-              <a:rPr sz="1600" b="0" i="0">
+              <a:rPr sz="2000" b="0" i="0">
                 <a:solidFill>
                   <a:srgbClr val="333333"/>
                 </a:solidFill>
@@ -4294,7 +4294,7 @@
               <a:t> la </a:t>
             </a:r>
             <a:r>
-              <a:rPr sz="1600" b="1" i="0">
+              <a:rPr sz="2000" b="1" i="0">
                 <a:solidFill>
                   <a:srgbClr val="333333"/>
                 </a:solidFill>
@@ -4303,7 +4303,7 @@
               <a:t>capa de datos</a:t>
             </a:r>
             <a:r>
-              <a:rPr sz="1600" b="0" i="0">
+              <a:rPr sz="2000" b="0" i="0">
                 <a:solidFill>
                   <a:srgbClr val="333333"/>
                 </a:solidFill>
@@ -4523,7 +4523,7 @@
               </a:spcAft>
             </a:pPr>
             <a:r>
-              <a:rPr sz="1600" b="0" i="0">
+              <a:rPr sz="2000" b="0" i="0">
                 <a:solidFill>
                   <a:srgbClr val="333333"/>
                 </a:solidFill>
@@ -4532,7 +4532,7 @@
               <a:t>–   Herramientas </a:t>
             </a:r>
             <a:r>
-              <a:rPr sz="1600" b="1" i="0">
+              <a:rPr sz="2000" b="1" i="0">
                 <a:solidFill>
                   <a:srgbClr val="333333"/>
                 </a:solidFill>
@@ -4541,7 +4541,7 @@
               <a:t>gratis en navegador</a:t>
             </a:r>
             <a:r>
-              <a:rPr sz="1600" b="0" i="0">
+              <a:rPr sz="2000" b="0" i="0">
                 <a:solidFill>
                   <a:srgbClr val="333333"/>
                 </a:solidFill>
@@ -4557,7 +4557,7 @@
               </a:spcAft>
             </a:pPr>
             <a:r>
-              <a:rPr sz="1600" b="0" i="0">
+              <a:rPr sz="2000" b="0" i="0">
                 <a:solidFill>
                   <a:srgbClr val="333333"/>
                 </a:solidFill>
@@ -4566,7 +4566,7 @@
               <a:t>–   </a:t>
             </a:r>
             <a:r>
-              <a:rPr sz="1600" b="1" i="0">
+              <a:rPr sz="2000" b="1" i="0">
                 <a:solidFill>
                   <a:srgbClr val="333333"/>
                 </a:solidFill>
@@ -4575,7 +4575,7 @@
               <a:t>ExamLab</a:t>
             </a:r>
             <a:r>
-              <a:rPr sz="1600" b="0" i="0">
+              <a:rPr sz="2000" b="0" i="0">
                 <a:solidFill>
                   <a:srgbClr val="333333"/>
                 </a:solidFill>
@@ -4591,7 +4591,7 @@
               </a:spcAft>
             </a:pPr>
             <a:r>
-              <a:rPr sz="1600" b="0" i="0">
+              <a:rPr sz="2000" b="0" i="0">
                 <a:solidFill>
                   <a:srgbClr val="333333"/>
                 </a:solidFill>
@@ -4600,7 +4600,7 @@
               <a:t>–   SQL: </a:t>
             </a:r>
             <a:r>
-              <a:rPr sz="1600" b="1" i="0">
+              <a:rPr sz="2000" b="1" i="0">
                 <a:solidFill>
                   <a:srgbClr val="333333"/>
                 </a:solidFill>
@@ -4609,7 +4609,7 @@
               <a:t>DB Fiddle</a:t>
             </a:r>
             <a:r>
-              <a:rPr sz="1600" b="0" i="0">
+              <a:rPr sz="2000" b="0" i="0">
                 <a:solidFill>
                   <a:srgbClr val="333333"/>
                 </a:solidFill>
@@ -4618,7 +4618,7 @@
               <a:t> / SQLTest.online · PL/SQL: </a:t>
             </a:r>
             <a:r>
-              <a:rPr sz="1600" b="1" i="0">
+              <a:rPr sz="2000" b="1" i="0">
                 <a:solidFill>
                   <a:srgbClr val="333333"/>
                 </a:solidFill>
@@ -4627,7 +4627,7 @@
               <a:t>Oracle Live SQL</a:t>
             </a:r>
             <a:r>
-              <a:rPr sz="1600" b="0" i="0">
+              <a:rPr sz="2000" b="0" i="0">
                 <a:solidFill>
                   <a:srgbClr val="333333"/>
                 </a:solidFill>
@@ -4643,7 +4643,7 @@
               </a:spcAft>
             </a:pPr>
             <a:r>
-              <a:rPr sz="1600" b="0" i="0">
+              <a:rPr sz="2000" b="0" i="0">
                 <a:solidFill>
                   <a:srgbClr val="333333"/>
                 </a:solidFill>
@@ -4652,7 +4652,7 @@
               <a:t>–   Modelos ER: </a:t>
             </a:r>
             <a:r>
-              <a:rPr sz="1600" b="1" i="0">
+              <a:rPr sz="2000" b="1" i="0">
                 <a:solidFill>
                   <a:srgbClr val="333333"/>
                 </a:solidFill>
@@ -4661,7 +4661,7 @@
               <a:t>draw.io / diagrams.net</a:t>
             </a:r>
             <a:r>
-              <a:rPr sz="1600" b="0" i="0">
+              <a:rPr sz="2000" b="0" i="0">
                 <a:solidFill>
                   <a:srgbClr val="333333"/>
                 </a:solidFill>
@@ -4670,7 +4670,7 @@
               <a:t> · bocetos: </a:t>
             </a:r>
             <a:r>
-              <a:rPr sz="1600" b="1" i="0">
+              <a:rPr sz="2000" b="1" i="0">
                 <a:solidFill>
                   <a:srgbClr val="333333"/>
                 </a:solidFill>
@@ -4679,7 +4679,7 @@
               <a:t>Excalidraw</a:t>
             </a:r>
             <a:r>
-              <a:rPr sz="1600" b="0" i="0">
+              <a:rPr sz="2000" b="0" i="0">
                 <a:solidFill>
                   <a:srgbClr val="333333"/>
                 </a:solidFill>
@@ -4695,7 +4695,7 @@
               </a:spcAft>
             </a:pPr>
             <a:r>
-              <a:rPr sz="1600" b="0" i="0">
+              <a:rPr sz="2000" b="0" i="0">
                 <a:solidFill>
                   <a:srgbClr val="333333"/>
                 </a:solidFill>
@@ -7941,7 +7941,7 @@
               </a:spcAft>
             </a:pPr>
             <a:r>
-              <a:rPr sz="1600" b="0" i="0">
+              <a:rPr sz="2000" b="0" i="0">
                 <a:solidFill>
                   <a:srgbClr val="333333"/>
                 </a:solidFill>
@@ -7950,7 +7950,7 @@
               <a:t>–   Profundizar la </a:t>
             </a:r>
             <a:r>
-              <a:rPr sz="1600" b="1" i="0">
+              <a:rPr sz="2000" b="1" i="0">
                 <a:solidFill>
                   <a:srgbClr val="333333"/>
                 </a:solidFill>
@@ -7959,7 +7959,7 @@
               <a:t>gestion avanzada</a:t>
             </a:r>
             <a:r>
-              <a:rPr sz="1600" b="0" i="0">
+              <a:rPr sz="2000" b="0" i="0">
                 <a:solidFill>
                   <a:srgbClr val="333333"/>
                 </a:solidFill>
@@ -7975,7 +7975,7 @@
               </a:spcAft>
             </a:pPr>
             <a:r>
-              <a:rPr sz="1600" b="0" i="0">
+              <a:rPr sz="2000" b="0" i="0">
                 <a:solidFill>
                   <a:srgbClr val="333333"/>
                 </a:solidFill>
@@ -7991,7 +7991,7 @@
               </a:spcAft>
             </a:pPr>
             <a:r>
-              <a:rPr sz="1600" b="0" i="0">
+              <a:rPr sz="2000" b="0" i="0">
                 <a:solidFill>
                   <a:srgbClr val="333333"/>
                 </a:solidFill>
@@ -8007,7 +8007,7 @@
               </a:spcAft>
             </a:pPr>
             <a:r>
-              <a:rPr sz="1600" b="0" i="0">
+              <a:rPr sz="2000" b="0" i="0">
                 <a:solidFill>
                   <a:srgbClr val="333333"/>
                 </a:solidFill>
@@ -8016,7 +8016,7 @@
               <a:t>–   </a:t>
             </a:r>
             <a:r>
-              <a:rPr sz="1600" b="1" i="0">
+              <a:rPr sz="2000" b="1" i="0">
                 <a:solidFill>
                   <a:srgbClr val="333333"/>
                 </a:solidFill>
@@ -8025,7 +8025,7 @@
               <a:t>Objeto de estudio:</a:t>
             </a:r>
             <a:r>
-              <a:rPr sz="1600" b="0" i="0">
+              <a:rPr sz="2000" b="0" i="0">
                 <a:solidFill>
                   <a:srgbClr val="333333"/>
                 </a:solidFill>
@@ -8245,7 +8245,7 @@
               </a:spcAft>
             </a:pPr>
             <a:r>
-              <a:rPr sz="1500" b="0" i="0">
+              <a:rPr sz="2000" b="0" i="0">
                 <a:solidFill>
                   <a:srgbClr val="333333"/>
                 </a:solidFill>
@@ -8254,7 +8254,7 @@
               <a:t>–   </a:t>
             </a:r>
             <a:r>
-              <a:rPr sz="1500" b="1" i="0">
+              <a:rPr sz="2000" b="1" i="0">
                 <a:solidFill>
                   <a:srgbClr val="333333"/>
                 </a:solidFill>
@@ -8263,7 +8263,7 @@
               <a:t>Objeto de estudio:</a:t>
             </a:r>
             <a:r>
-              <a:rPr sz="1500" b="0" i="0">
+              <a:rPr sz="2000" b="0" i="0">
                 <a:solidFill>
                   <a:srgbClr val="333333"/>
                 </a:solidFill>
@@ -8279,7 +8279,7 @@
               </a:spcAft>
             </a:pPr>
             <a:r>
-              <a:rPr sz="1500" b="0" i="0">
+              <a:rPr sz="2000" b="0" i="0">
                 <a:solidFill>
                   <a:srgbClr val="333333"/>
                 </a:solidFill>
@@ -8288,7 +8288,7 @@
               <a:t>–   </a:t>
             </a:r>
             <a:r>
-              <a:rPr sz="1500" b="1" i="0">
+              <a:rPr sz="2000" b="1" i="0">
                 <a:solidFill>
                   <a:srgbClr val="333333"/>
                 </a:solidFill>
@@ -8297,7 +8297,7 @@
               <a:t>Objetivo:</a:t>
             </a:r>
             <a:r>
-              <a:rPr sz="1500" b="0" i="0">
+              <a:rPr sz="2000" b="0" i="0">
                 <a:solidFill>
                   <a:srgbClr val="333333"/>
                 </a:solidFill>
@@ -8306,7 +8306,7 @@
               <a:t> diseñar, administrar y optimizar bases de datos relacionales avanzadas, garantizando </a:t>
             </a:r>
             <a:r>
-              <a:rPr sz="1500" b="1" i="0">
+              <a:rPr sz="2000" b="1" i="0">
                 <a:solidFill>
                   <a:srgbClr val="333333"/>
                 </a:solidFill>
@@ -8315,7 +8315,7 @@
               <a:t>seguridad</a:t>
             </a:r>
             <a:r>
-              <a:rPr sz="1500" b="0" i="0">
+              <a:rPr sz="2000" b="0" i="0">
                 <a:solidFill>
                   <a:srgbClr val="333333"/>
                 </a:solidFill>
@@ -8324,7 +8324,7 @@
               <a:t>, </a:t>
             </a:r>
             <a:r>
-              <a:rPr sz="1500" b="1" i="0">
+              <a:rPr sz="2000" b="1" i="0">
                 <a:solidFill>
                   <a:srgbClr val="333333"/>
                 </a:solidFill>
@@ -8333,7 +8333,7 @@
               <a:t>integridad</a:t>
             </a:r>
             <a:r>
-              <a:rPr sz="1500" b="0" i="0">
+              <a:rPr sz="2000" b="0" i="0">
                 <a:solidFill>
                   <a:srgbClr val="333333"/>
                 </a:solidFill>
@@ -8342,7 +8342,7 @@
               <a:t> y </a:t>
             </a:r>
             <a:r>
-              <a:rPr sz="1500" b="1" i="0">
+              <a:rPr sz="2000" b="1" i="0">
                 <a:solidFill>
                   <a:srgbClr val="333333"/>
                 </a:solidFill>
@@ -8351,7 +8351,7 @@
               <a:t>eficiencia</a:t>
             </a:r>
             <a:r>
-              <a:rPr sz="1500" b="0" i="0">
+              <a:rPr sz="2000" b="0" i="0">
                 <a:solidFill>
                   <a:srgbClr val="333333"/>
                 </a:solidFill>
@@ -8367,7 +8367,7 @@
               </a:spcAft>
             </a:pPr>
             <a:r>
-              <a:rPr sz="1500" b="0" i="0">
+              <a:rPr sz="2000" b="0" i="0">
                 <a:solidFill>
                   <a:srgbClr val="333333"/>
                 </a:solidFill>
@@ -8383,7 +8383,7 @@
               </a:spcAft>
             </a:pPr>
             <a:r>
-              <a:rPr sz="1500" b="0" i="0">
+              <a:rPr sz="2000" b="0" i="0">
                 <a:solidFill>
                   <a:srgbClr val="333333"/>
                 </a:solidFill>
@@ -8603,7 +8603,7 @@
               </a:spcAft>
             </a:pPr>
             <a:r>
-              <a:rPr sz="1500" b="0" i="0">
+              <a:rPr sz="2000" b="0" i="0">
                 <a:solidFill>
                   <a:srgbClr val="333333"/>
                 </a:solidFill>
@@ -8612,7 +8612,7 @@
               <a:t>–   </a:t>
             </a:r>
             <a:r>
-              <a:rPr sz="1500" b="1" i="0">
+              <a:rPr sz="2000" b="1" i="0">
                 <a:solidFill>
                   <a:srgbClr val="333333"/>
                 </a:solidFill>
@@ -8621,7 +8621,7 @@
               <a:t>RAA1</a:t>
             </a:r>
             <a:r>
-              <a:rPr sz="1500" b="0" i="0">
+              <a:rPr sz="2000" b="0" i="0">
                 <a:solidFill>
                   <a:srgbClr val="333333"/>
                 </a:solidFill>
@@ -8637,7 +8637,7 @@
               </a:spcAft>
             </a:pPr>
             <a:r>
-              <a:rPr sz="1500" b="0" i="0">
+              <a:rPr sz="2000" b="0" i="0">
                 <a:solidFill>
                   <a:srgbClr val="333333"/>
                 </a:solidFill>
@@ -8646,7 +8646,7 @@
               <a:t>–   </a:t>
             </a:r>
             <a:r>
-              <a:rPr sz="1500" b="1" i="0">
+              <a:rPr sz="2000" b="1" i="0">
                 <a:solidFill>
                   <a:srgbClr val="333333"/>
                 </a:solidFill>
@@ -8655,7 +8655,7 @@
               <a:t>RAA2</a:t>
             </a:r>
             <a:r>
-              <a:rPr sz="1500" b="0" i="0">
+              <a:rPr sz="2000" b="0" i="0">
                 <a:solidFill>
                   <a:srgbClr val="333333"/>
                 </a:solidFill>
@@ -8671,7 +8671,7 @@
               </a:spcAft>
             </a:pPr>
             <a:r>
-              <a:rPr sz="1500" b="0" i="0">
+              <a:rPr sz="2000" b="0" i="0">
                 <a:solidFill>
                   <a:srgbClr val="333333"/>
                 </a:solidFill>
@@ -8680,7 +8680,7 @@
               <a:t>–   </a:t>
             </a:r>
             <a:r>
-              <a:rPr sz="1500" b="1" i="0">
+              <a:rPr sz="2000" b="1" i="0">
                 <a:solidFill>
                   <a:srgbClr val="333333"/>
                 </a:solidFill>
@@ -8689,7 +8689,7 @@
               <a:t>RAA3</a:t>
             </a:r>
             <a:r>
-              <a:rPr sz="1500" b="0" i="0">
+              <a:rPr sz="2000" b="0" i="0">
                 <a:solidFill>
                   <a:srgbClr val="333333"/>
                 </a:solidFill>
@@ -8909,7 +8909,7 @@
               </a:spcAft>
             </a:pPr>
             <a:r>
-              <a:rPr sz="1600" b="0" i="0">
+              <a:rPr sz="2000" b="0" i="0">
                 <a:solidFill>
                   <a:srgbClr val="333333"/>
                 </a:solidFill>
@@ -8918,7 +8918,7 @@
               <a:t>–   </a:t>
             </a:r>
             <a:r>
-              <a:rPr sz="1600" b="1" i="0">
+              <a:rPr sz="2000" b="1" i="0">
                 <a:solidFill>
                   <a:srgbClr val="333333"/>
                 </a:solidFill>
@@ -8927,7 +8927,7 @@
               <a:t>Sesión 0 (hoy)</a:t>
             </a:r>
             <a:r>
-              <a:rPr sz="1600" b="0" i="0">
+              <a:rPr sz="2000" b="0" i="0">
                 <a:solidFill>
                   <a:srgbClr val="333333"/>
                 </a:solidFill>
@@ -8936,7 +8936,7 @@
               <a:t> = logística + acuerdo pedagógico + evaluación + CONTENIDO + </a:t>
             </a:r>
             <a:r>
-              <a:rPr sz="1600" b="1" i="0">
+              <a:rPr sz="2000" b="1" i="0">
                 <a:solidFill>
                   <a:srgbClr val="333333"/>
                 </a:solidFill>
@@ -8945,7 +8945,7 @@
               <a:t>socialización del Proyecto Integrador VetCare</a:t>
             </a:r>
             <a:r>
-              <a:rPr sz="1600" b="0" i="0">
+              <a:rPr sz="2000" b="0" i="0">
                 <a:solidFill>
                   <a:srgbClr val="333333"/>
                 </a:solidFill>
@@ -8961,7 +8961,7 @@
               </a:spcAft>
             </a:pPr>
             <a:r>
-              <a:rPr sz="1600" b="0" i="0">
+              <a:rPr sz="2000" b="0" i="0">
                 <a:solidFill>
                   <a:srgbClr val="333333"/>
                 </a:solidFill>
@@ -8970,7 +8970,7 @@
               <a:t>–   </a:t>
             </a:r>
             <a:r>
-              <a:rPr sz="1600" b="1" i="0">
+              <a:rPr sz="2000" b="1" i="0">
                 <a:solidFill>
                   <a:srgbClr val="333333"/>
                 </a:solidFill>
@@ -8979,7 +8979,7 @@
               <a:t>Sesión 1</a:t>
             </a:r>
             <a:r>
-              <a:rPr sz="1600" b="0" i="0">
+              <a:rPr sz="2000" b="0" i="0">
                 <a:solidFill>
                   <a:srgbClr val="333333"/>
                 </a:solidFill>
@@ -8995,7 +8995,7 @@
               </a:spcAft>
             </a:pPr>
             <a:r>
-              <a:rPr sz="1600" b="0" i="0">
+              <a:rPr sz="2000" b="0" i="0">
                 <a:solidFill>
                   <a:srgbClr val="333333"/>
                 </a:solidFill>
@@ -9004,7 +9004,7 @@
               <a:t>–   Cada lunes (120 min): </a:t>
             </a:r>
             <a:r>
-              <a:rPr sz="1600" b="1" i="0">
+              <a:rPr sz="2000" b="1" i="0">
                 <a:solidFill>
                   <a:srgbClr val="333333"/>
                 </a:solidFill>
@@ -9013,7 +9013,7 @@
               <a:t>Teoría Core</a:t>
             </a:r>
             <a:r>
-              <a:rPr sz="1600" b="0" i="0">
+              <a:rPr sz="2000" b="0" i="0">
                 <a:solidFill>
                   <a:srgbClr val="333333"/>
                 </a:solidFill>
@@ -9022,7 +9022,7 @@
               <a:t> → </a:t>
             </a:r>
             <a:r>
-              <a:rPr sz="1600" b="1" i="0">
+              <a:rPr sz="2000" b="1" i="0">
                 <a:solidFill>
                   <a:srgbClr val="333333"/>
                 </a:solidFill>
@@ -9031,7 +9031,7 @@
               <a:t>Taller / laboratorio en la nube</a:t>
             </a:r>
             <a:r>
-              <a:rPr sz="1600" b="0" i="0">
+              <a:rPr sz="2000" b="0" i="0">
                 <a:solidFill>
                   <a:srgbClr val="333333"/>
                 </a:solidFill>
@@ -9040,7 +9040,7 @@
               <a:t> → cierre. </a:t>
             </a:r>
             <a:r>
-              <a:rPr sz="1600" b="1" i="0">
+              <a:rPr sz="2000" b="1" i="0">
                 <a:solidFill>
                   <a:srgbClr val="333333"/>
                 </a:solidFill>
@@ -9049,7 +9049,7 @@
               <a:t>13 sesiones</a:t>
             </a:r>
             <a:r>
-              <a:rPr sz="1600" b="0" i="0">
+              <a:rPr sz="2000" b="0" i="0">
                 <a:solidFill>
                   <a:srgbClr val="333333"/>
                 </a:solidFill>
@@ -9058,7 +9058,7 @@
               <a:t>, todas </a:t>
             </a:r>
             <a:r>
-              <a:rPr sz="1600" b="1" i="0">
+              <a:rPr sz="2000" b="1" i="0">
                 <a:solidFill>
                   <a:srgbClr val="333333"/>
                 </a:solidFill>
@@ -9067,7 +9067,7 @@
               <a:t>virtuales síncronas por Meet</a:t>
             </a:r>
             <a:r>
-              <a:rPr sz="1600" b="0" i="0">
+              <a:rPr sz="2000" b="0" i="0">
                 <a:solidFill>
                   <a:srgbClr val="333333"/>
                 </a:solidFill>
@@ -9076,7 +9076,7 @@
               <a:t> — incluidos los parciales (</a:t>
             </a:r>
             <a:r>
-              <a:rPr sz="1600" b="1" i="0">
+              <a:rPr sz="2000" b="1" i="0">
                 <a:solidFill>
                   <a:srgbClr val="333333"/>
                 </a:solidFill>
@@ -9085,7 +9085,7 @@
               <a:t>5 / 9 / 12</a:t>
             </a:r>
             <a:r>
-              <a:rPr sz="1600" b="0" i="0">
+              <a:rPr sz="2000" b="0" i="0">
                 <a:solidFill>
                   <a:srgbClr val="333333"/>
                 </a:solidFill>
@@ -9094,7 +9094,7 @@
               <a:t>); festivos = </a:t>
             </a:r>
             <a:r>
-              <a:rPr sz="1600" b="1" i="0">
+              <a:rPr sz="2000" b="1" i="0">
                 <a:solidFill>
                   <a:srgbClr val="333333"/>
                 </a:solidFill>
@@ -9103,7 +9103,7 @@
               <a:t>clase autónoma</a:t>
             </a:r>
             <a:r>
-              <a:rPr sz="1600" b="0" i="0">
+              <a:rPr sz="2000" b="0" i="0">
                 <a:solidFill>
                   <a:srgbClr val="333333"/>
                 </a:solidFill>
@@ -9112,7 +9112,7 @@
               <a:t>; dos sesiones </a:t>
             </a:r>
             <a:r>
-              <a:rPr sz="1600" b="1" i="0">
+              <a:rPr sz="2000" b="1" i="0">
                 <a:solidFill>
                   <a:srgbClr val="333333"/>
                 </a:solidFill>
@@ -9121,7 +9121,7 @@
               <a:t>dobles</a:t>
             </a:r>
             <a:r>
-              <a:rPr sz="1600" b="0" i="0">
+              <a:rPr sz="2000" b="0" i="0">
                 <a:solidFill>
                   <a:srgbClr val="333333"/>
                 </a:solidFill>
@@ -9130,7 +9130,7 @@
               <a:t> y sustentación en la </a:t>
             </a:r>
             <a:r>
-              <a:rPr sz="1600" b="1" i="0">
+              <a:rPr sz="2000" b="1" i="0">
                 <a:solidFill>
                   <a:srgbClr val="333333"/>
                 </a:solidFill>
@@ -9139,7 +9139,7 @@
               <a:t>sesión 13</a:t>
             </a:r>
             <a:r>
-              <a:rPr sz="1600" b="0" i="0">
+              <a:rPr sz="2000" b="0" i="0">
                 <a:solidFill>
                   <a:srgbClr val="333333"/>
                 </a:solidFill>
@@ -9155,7 +9155,7 @@
               </a:spcAft>
             </a:pPr>
             <a:r>
-              <a:rPr sz="1600" b="0" i="0">
+              <a:rPr sz="2000" b="0" i="0">
                 <a:solidFill>
                   <a:srgbClr val="333333"/>
                 </a:solidFill>
@@ -9164,7 +9164,7 @@
               <a:t>–   Herramientas </a:t>
             </a:r>
             <a:r>
-              <a:rPr sz="1600" b="1" i="0">
+              <a:rPr sz="2000" b="1" i="0">
                 <a:solidFill>
                   <a:srgbClr val="333333"/>
                 </a:solidFill>
@@ -9173,7 +9173,7 @@
               <a:t>gratis + en la nube</a:t>
             </a:r>
             <a:r>
-              <a:rPr sz="1600" b="0" i="0">
+              <a:rPr sz="2000" b="0" i="0">
                 <a:solidFill>
                   <a:srgbClr val="333333"/>
                 </a:solidFill>
@@ -9182,7 +9182,7 @@
               <a:t>. Talleres y quices/parciales se entregan/presentan en </a:t>
             </a:r>
             <a:r>
-              <a:rPr sz="1600" b="1" i="0">
+              <a:rPr sz="2000" b="1" i="0">
                 <a:solidFill>
                   <a:srgbClr val="333333"/>
                 </a:solidFill>
@@ -9191,7 +9191,7 @@
               <a:t>ExamLab</a:t>
             </a:r>
             <a:r>
-              <a:rPr sz="1600" b="0" i="0">
+              <a:rPr sz="2000" b="0" i="0">
                 <a:solidFill>
                   <a:srgbClr val="333333"/>
                 </a:solidFill>
@@ -9207,7 +9207,7 @@
               </a:spcAft>
             </a:pPr>
             <a:r>
-              <a:rPr sz="1600" b="0" i="0">
+              <a:rPr sz="2000" b="0" i="0">
                 <a:solidFill>
                   <a:srgbClr val="333333"/>
                 </a:solidFill>
@@ -9216,7 +9216,7 @@
               <a:t>–   Hilo conductor de todo el semestre: </a:t>
             </a:r>
             <a:r>
-              <a:rPr sz="1600" b="1" i="0">
+              <a:rPr sz="2000" b="1" i="0">
                 <a:solidFill>
                   <a:srgbClr val="333333"/>
                 </a:solidFill>
@@ -9225,7 +9225,7 @@
               <a:t>Proyecto Integrador VetCare DB</a:t>
             </a:r>
             <a:r>
-              <a:rPr sz="1600" b="0" i="0">
+              <a:rPr sz="2000" b="0" i="0">
                 <a:solidFill>
                   <a:srgbClr val="333333"/>
                 </a:solidFill>
